--- a/workshops/Maker_Faire/PRG32_Maker_Faire_EN.pptx
+++ b/workshops/Maker_Faire/PRG32_Maker_Faire_EN.pptx
@@ -164,14 +164,14 @@
   <p:extLst>
     <p:ext uri="{521415D9-36F7-43E2-AB2F-B90AF26B5E84}">
       <p14:sectionLst xmlns:p14="http://schemas.microsoft.com/office/powerpoint/2010/main">
-        <p14:section name="Opening" id="{2ee281e4-cd4f-89b1-ded9-d726df78e508}">
+        <p14:section name="Opening" id="{1cfae969-7843-0f1d-8808-810cd7bd7086}">
           <p14:sldIdLst>
             <p14:sldId id="256"/>
             <p14:sldId id="257"/>
             <p14:sldId id="258"/>
           </p14:sldIdLst>
         </p14:section>
-        <p14:section name="Part 1: welcome to the PRG32 universe" id="{8186c178-e606-1739-8ef6-4985aadd4ef5}">
+        <p14:section name="Part 1: welcome to the PRG32 universe" id="{d77d59d9-8d8b-3aa6-ed6a-847757193704}">
           <p14:sldIdLst>
             <p14:sldId id="259"/>
             <p14:sldId id="260"/>
@@ -187,7 +187,7 @@
             <p14:sldId id="270"/>
           </p14:sldIdLst>
         </p14:section>
-        <p14:section name="Hands-on 1: your first cartridge" id="{baa8f345-d1e8-0fb1-8d80-075a55133d7a}">
+        <p14:section name="Hands-on 1: your first cartridge" id="{fcb62386-1309-5091-a58f-00f7bfba17f6}">
           <p14:sldIdLst>
             <p14:sldId id="271"/>
             <p14:sldId id="272"/>
@@ -198,7 +198,7 @@
             <p14:sldId id="277"/>
           </p14:sldIdLst>
         </p14:section>
-        <p14:section name="Part 2: programming games in assembly" id="{edf90e14-68b6-48c1-6d30-66173d182cba}">
+        <p14:section name="Part 2: programming games in assembly" id="{51319c1c-6009-8da5-8b75-b018893538ab}">
           <p14:sldIdLst>
             <p14:sldId id="278"/>
             <p14:sldId id="279"/>
@@ -210,7 +210,7 @@
             <p14:sldId id="285"/>
           </p14:sldIdLst>
         </p14:section>
-        <p14:section name="Hands-on 2: a game in assembly" id="{13dc11c6-b174-9b0e-9bd7-79584386b401}">
+        <p14:section name="Hands-on 2: a game in assembly" id="{019f8c08-3ec7-faf3-7947-27568b412811}">
           <p14:sldIdLst>
             <p14:sldId id="286"/>
             <p14:sldId id="287"/>
@@ -223,7 +223,7 @@
             <p14:sldId id="294"/>
           </p14:sldIdLst>
         </p14:section>
-        <p14:section name="Part 3: from assembly to C" id="{bedea58c-f4ce-d220-dc1e-86cc140bebe1}">
+        <p14:section name="Part 3: from assembly to C" id="{a5cb4001-edff-7ae6-2876-877ab92055b5}">
           <p14:sldIdLst>
             <p14:sldId id="295"/>
             <p14:sldId id="296"/>
@@ -235,7 +235,7 @@
             <p14:sldId id="302"/>
           </p14:sldIdLst>
         </p14:section>
-        <p14:section name="Hands-on 3: C and assembly together" id="{ec1d18da-643a-07d7-132f-6876dde659bd}">
+        <p14:section name="Hands-on 3: C and assembly together" id="{1a175324-e157-4064-2a0a-40a58a63d008}">
           <p14:sldIdLst>
             <p14:sldId id="303"/>
             <p14:sldId id="304"/>
@@ -246,14 +246,14 @@
             <p14:sldId id="309"/>
           </p14:sldIdLst>
         </p14:section>
-        <p14:section name="Where to go from here" id="{0577385d-7f87-1117-65f2-5e850774c315}">
+        <p14:section name="Where to go from here" id="{f9f57ead-f767-62d2-0ef9-4240dc3944dd}">
           <p14:sldIdLst>
             <p14:sldId id="310"/>
             <p14:sldId id="311"/>
             <p14:sldId id="312"/>
           </p14:sldIdLst>
         </p14:section>
-        <p14:section name="Closing" id="{977dadec-1747-c1a3-0278-f338aefc5f09}">
+        <p14:section name="Closing" id="{d6fd81f1-3909-674e-be74-639a39b8a308}">
           <p14:sldIdLst>
             <p14:sldId id="313"/>
           </p14:sldIdLst>
@@ -9224,7 +9224,7 @@
               <a:buNone/>
             </a:pPr>
             <a:r>
-              <a:rPr lang="en-US" sz="1022" dirty="0">
+              <a:rPr lang="en-US" sz="1398" dirty="0">
                 <a:solidFill>
                   <a:srgbClr val="5B6B78"/>
                 </a:solidFill>
@@ -9234,7 +9234,7 @@
               </a:rPr>
               <a:t>+0</a:t>
             </a:r>
-            <a:endParaRPr lang="en-US" sz="1022" dirty="0"/>
+            <a:endParaRPr lang="en-US" sz="1398" dirty="0"/>
           </a:p>
         </p:txBody>
       </p:sp>
@@ -9269,7 +9269,7 @@
               <a:buNone/>
             </a:pPr>
             <a:r>
-              <a:rPr lang="en-US" sz="1222" b="1" dirty="0">
+              <a:rPr lang="en-US" sz="1598" b="1" dirty="0">
                 <a:solidFill>
                   <a:srgbClr val="FFFFFF"/>
                 </a:solidFill>
@@ -9279,7 +9279,7 @@
               </a:rPr>
               <a:t>PRG2</a:t>
             </a:r>
-            <a:endParaRPr lang="en-US" sz="1222" dirty="0"/>
+            <a:endParaRPr lang="en-US" sz="1598" dirty="0"/>
           </a:p>
         </p:txBody>
       </p:sp>
@@ -9308,7 +9308,7 @@
               <a:buNone/>
             </a:pPr>
             <a:r>
-              <a:rPr lang="en-US" sz="1022" dirty="0">
+              <a:rPr lang="en-US" sz="1398" dirty="0">
                 <a:solidFill>
                   <a:srgbClr val="5B6B78"/>
                 </a:solidFill>
@@ -9318,7 +9318,7 @@
               </a:rPr>
               <a:t>4 bytes</a:t>
             </a:r>
-            <a:endParaRPr lang="en-US" sz="1022" dirty="0"/>
+            <a:endParaRPr lang="en-US" sz="1398" dirty="0"/>
           </a:p>
         </p:txBody>
       </p:sp>
@@ -9347,7 +9347,7 @@
               <a:buNone/>
             </a:pPr>
             <a:r>
-              <a:rPr lang="en-US" sz="1222" dirty="0">
+              <a:rPr lang="en-US" sz="1598" dirty="0">
                 <a:solidFill>
                   <a:srgbClr val="1B2530"/>
                 </a:solidFill>
@@ -9357,7 +9357,7 @@
               </a:rPr>
               <a:t>format signature</a:t>
             </a:r>
-            <a:endParaRPr lang="en-US" sz="1222" dirty="0"/>
+            <a:endParaRPr lang="en-US" sz="1598" dirty="0"/>
           </a:p>
         </p:txBody>
       </p:sp>
@@ -9386,7 +9386,7 @@
               <a:buNone/>
             </a:pPr>
             <a:r>
-              <a:rPr lang="en-US" sz="1022" dirty="0">
+              <a:rPr lang="en-US" sz="1398" dirty="0">
                 <a:solidFill>
                   <a:srgbClr val="5B6B78"/>
                 </a:solidFill>
@@ -9396,7 +9396,7 @@
               </a:rPr>
               <a:t>+4</a:t>
             </a:r>
-            <a:endParaRPr lang="en-US" sz="1022" dirty="0"/>
+            <a:endParaRPr lang="en-US" sz="1398" dirty="0"/>
           </a:p>
         </p:txBody>
       </p:sp>
@@ -9431,7 +9431,7 @@
               <a:buNone/>
             </a:pPr>
             <a:r>
-              <a:rPr lang="en-US" sz="1222" b="1" dirty="0">
+              <a:rPr lang="en-US" sz="1598" b="1" dirty="0">
                 <a:solidFill>
                   <a:srgbClr val="FFFFFF"/>
                 </a:solidFill>
@@ -9441,7 +9441,7 @@
               </a:rPr>
               <a:t>ABI version</a:t>
             </a:r>
-            <a:endParaRPr lang="en-US" sz="1222" dirty="0"/>
+            <a:endParaRPr lang="en-US" sz="1598" dirty="0"/>
           </a:p>
         </p:txBody>
       </p:sp>
@@ -9470,7 +9470,7 @@
               <a:buNone/>
             </a:pPr>
             <a:r>
-              <a:rPr lang="en-US" sz="1022" dirty="0">
+              <a:rPr lang="en-US" sz="1398" dirty="0">
                 <a:solidFill>
                   <a:srgbClr val="5B6B78"/>
                 </a:solidFill>
@@ -9480,7 +9480,7 @@
               </a:rPr>
               <a:t>4 bytes</a:t>
             </a:r>
-            <a:endParaRPr lang="en-US" sz="1022" dirty="0"/>
+            <a:endParaRPr lang="en-US" sz="1398" dirty="0"/>
           </a:p>
         </p:txBody>
       </p:sp>
@@ -9509,7 +9509,7 @@
               <a:buNone/>
             </a:pPr>
             <a:r>
-              <a:rPr lang="en-US" sz="1222" dirty="0">
+              <a:rPr lang="en-US" sz="1598" dirty="0">
                 <a:solidFill>
                   <a:srgbClr val="1B2530"/>
                 </a:solidFill>
@@ -9519,7 +9519,7 @@
               </a:rPr>
               <a:t>which function table it expects</a:t>
             </a:r>
-            <a:endParaRPr lang="en-US" sz="1222" dirty="0"/>
+            <a:endParaRPr lang="en-US" sz="1598" dirty="0"/>
           </a:p>
         </p:txBody>
       </p:sp>
@@ -9548,7 +9548,7 @@
               <a:buNone/>
             </a:pPr>
             <a:r>
-              <a:rPr lang="en-US" sz="1022" dirty="0">
+              <a:rPr lang="en-US" sz="1398" dirty="0">
                 <a:solidFill>
                   <a:srgbClr val="5B6B78"/>
                 </a:solidFill>
@@ -9558,7 +9558,7 @@
               </a:rPr>
               <a:t>+8</a:t>
             </a:r>
-            <a:endParaRPr lang="en-US" sz="1022" dirty="0"/>
+            <a:endParaRPr lang="en-US" sz="1398" dirty="0"/>
           </a:p>
         </p:txBody>
       </p:sp>
@@ -9593,7 +9593,7 @@
               <a:buNone/>
             </a:pPr>
             <a:r>
-              <a:rPr lang="en-US" sz="1222" b="1" dirty="0">
+              <a:rPr lang="en-US" sz="1598" b="1" dirty="0">
                 <a:solidFill>
                   <a:srgbClr val="FFFFFF"/>
                 </a:solidFill>
@@ -9603,7 +9603,7 @@
               </a:rPr>
               <a:t>sizes, address</a:t>
             </a:r>
-            <a:endParaRPr lang="en-US" sz="1222" dirty="0"/>
+            <a:endParaRPr lang="en-US" sz="1598" dirty="0"/>
           </a:p>
         </p:txBody>
       </p:sp>
@@ -9632,7 +9632,7 @@
               <a:buNone/>
             </a:pPr>
             <a:r>
-              <a:rPr lang="en-US" sz="1022" dirty="0">
+              <a:rPr lang="en-US" sz="1398" dirty="0">
                 <a:solidFill>
                   <a:srgbClr val="5B6B78"/>
                 </a:solidFill>
@@ -9642,7 +9642,7 @@
               </a:rPr>
               <a:t>16 bytes</a:t>
             </a:r>
-            <a:endParaRPr lang="en-US" sz="1022" dirty="0"/>
+            <a:endParaRPr lang="en-US" sz="1398" dirty="0"/>
           </a:p>
         </p:txBody>
       </p:sp>
@@ -9671,7 +9671,7 @@
               <a:buNone/>
             </a:pPr>
             <a:r>
-              <a:rPr lang="en-US" sz="1222" dirty="0">
+              <a:rPr lang="en-US" sz="1598" dirty="0">
                 <a:solidFill>
                   <a:srgbClr val="1B2530"/>
                 </a:solidFill>
@@ -9681,7 +9681,7 @@
               </a:rPr>
               <a:t>where to load it and how large it is</a:t>
             </a:r>
-            <a:endParaRPr lang="en-US" sz="1222" dirty="0"/>
+            <a:endParaRPr lang="en-US" sz="1598" dirty="0"/>
           </a:p>
         </p:txBody>
       </p:sp>
@@ -9710,7 +9710,7 @@
               <a:buNone/>
             </a:pPr>
             <a:r>
-              <a:rPr lang="en-US" sz="1022" dirty="0">
+              <a:rPr lang="en-US" sz="1398" dirty="0">
                 <a:solidFill>
                   <a:srgbClr val="5B6B78"/>
                 </a:solidFill>
@@ -9720,7 +9720,7 @@
               </a:rPr>
               <a:t>+24</a:t>
             </a:r>
-            <a:endParaRPr lang="en-US" sz="1022" dirty="0"/>
+            <a:endParaRPr lang="en-US" sz="1398" dirty="0"/>
           </a:p>
         </p:txBody>
       </p:sp>
@@ -9755,7 +9755,7 @@
               <a:buNone/>
             </a:pPr>
             <a:r>
-              <a:rPr lang="en-US" sz="1222" b="1" dirty="0">
+              <a:rPr lang="en-US" sz="1598" b="1" dirty="0">
                 <a:solidFill>
                   <a:srgbClr val="FFFFFF"/>
                 </a:solidFill>
@@ -9765,7 +9765,7 @@
               </a:rPr>
               <a:t>init / update / draw</a:t>
             </a:r>
-            <a:endParaRPr lang="en-US" sz="1222" dirty="0"/>
+            <a:endParaRPr lang="en-US" sz="1598" dirty="0"/>
           </a:p>
         </p:txBody>
       </p:sp>
@@ -9794,7 +9794,7 @@
               <a:buNone/>
             </a:pPr>
             <a:r>
-              <a:rPr lang="en-US" sz="1022" dirty="0">
+              <a:rPr lang="en-US" sz="1398" dirty="0">
                 <a:solidFill>
                   <a:srgbClr val="5B6B78"/>
                 </a:solidFill>
@@ -9804,7 +9804,7 @@
               </a:rPr>
               <a:t>12 bytes</a:t>
             </a:r>
-            <a:endParaRPr lang="en-US" sz="1022" dirty="0"/>
+            <a:endParaRPr lang="en-US" sz="1398" dirty="0"/>
           </a:p>
         </p:txBody>
       </p:sp>
@@ -9833,7 +9833,7 @@
               <a:buNone/>
             </a:pPr>
             <a:r>
-              <a:rPr lang="en-US" sz="1222" dirty="0">
+              <a:rPr lang="en-US" sz="1598" dirty="0">
                 <a:solidFill>
                   <a:srgbClr val="1B2530"/>
                 </a:solidFill>
@@ -9843,7 +9843,7 @@
               </a:rPr>
               <a:t>the game's entry points</a:t>
             </a:r>
-            <a:endParaRPr lang="en-US" sz="1222" dirty="0"/>
+            <a:endParaRPr lang="en-US" sz="1598" dirty="0"/>
           </a:p>
         </p:txBody>
       </p:sp>
@@ -9872,7 +9872,7 @@
               <a:buNone/>
             </a:pPr>
             <a:r>
-              <a:rPr lang="en-US" sz="1022" dirty="0">
+              <a:rPr lang="en-US" sz="1398" dirty="0">
                 <a:solidFill>
                   <a:srgbClr val="5B6B78"/>
                 </a:solidFill>
@@ -9882,7 +9882,7 @@
               </a:rPr>
               <a:t>+36</a:t>
             </a:r>
-            <a:endParaRPr lang="en-US" sz="1022" dirty="0"/>
+            <a:endParaRPr lang="en-US" sz="1398" dirty="0"/>
           </a:p>
         </p:txBody>
       </p:sp>
@@ -9917,7 +9917,7 @@
               <a:buNone/>
             </a:pPr>
             <a:r>
-              <a:rPr lang="en-US" sz="1222" b="1" dirty="0">
+              <a:rPr lang="en-US" sz="1598" b="1" dirty="0">
                 <a:solidFill>
                   <a:srgbClr val="FFFFFF"/>
                 </a:solidFill>
@@ -9927,7 +9927,7 @@
               </a:rPr>
               <a:t>CRC32</a:t>
             </a:r>
-            <a:endParaRPr lang="en-US" sz="1222" dirty="0"/>
+            <a:endParaRPr lang="en-US" sz="1598" dirty="0"/>
           </a:p>
         </p:txBody>
       </p:sp>
@@ -9956,7 +9956,7 @@
               <a:buNone/>
             </a:pPr>
             <a:r>
-              <a:rPr lang="en-US" sz="1022" dirty="0">
+              <a:rPr lang="en-US" sz="1398" dirty="0">
                 <a:solidFill>
                   <a:srgbClr val="5B6B78"/>
                 </a:solidFill>
@@ -9966,7 +9966,7 @@
               </a:rPr>
               <a:t>4 bytes</a:t>
             </a:r>
-            <a:endParaRPr lang="en-US" sz="1022" dirty="0"/>
+            <a:endParaRPr lang="en-US" sz="1398" dirty="0"/>
           </a:p>
         </p:txBody>
       </p:sp>
@@ -9995,7 +9995,7 @@
               <a:buNone/>
             </a:pPr>
             <a:r>
-              <a:rPr lang="en-US" sz="1222" dirty="0">
+              <a:rPr lang="en-US" sz="1598" dirty="0">
                 <a:solidFill>
                   <a:srgbClr val="1B2530"/>
                 </a:solidFill>
@@ -10005,7 +10005,7 @@
               </a:rPr>
               <a:t>integrity</a:t>
             </a:r>
-            <a:endParaRPr lang="en-US" sz="1222" dirty="0"/>
+            <a:endParaRPr lang="en-US" sz="1598" dirty="0"/>
           </a:p>
         </p:txBody>
       </p:sp>
@@ -10034,7 +10034,7 @@
               <a:buNone/>
             </a:pPr>
             <a:r>
-              <a:rPr lang="en-US" sz="1022" dirty="0">
+              <a:rPr lang="en-US" sz="1398" dirty="0">
                 <a:solidFill>
                   <a:srgbClr val="5B6B78"/>
                 </a:solidFill>
@@ -10044,7 +10044,7 @@
               </a:rPr>
               <a:t>+40</a:t>
             </a:r>
-            <a:endParaRPr lang="en-US" sz="1022" dirty="0"/>
+            <a:endParaRPr lang="en-US" sz="1398" dirty="0"/>
           </a:p>
         </p:txBody>
       </p:sp>
@@ -10079,7 +10079,7 @@
               <a:buNone/>
             </a:pPr>
             <a:r>
-              <a:rPr lang="en-US" sz="1222" b="1" dirty="0">
+              <a:rPr lang="en-US" sz="1598" b="1" dirty="0">
                 <a:solidFill>
                   <a:srgbClr val="FFFFFF"/>
                 </a:solidFill>
@@ -10089,7 +10089,7 @@
               </a:rPr>
               <a:t>name</a:t>
             </a:r>
-            <a:endParaRPr lang="en-US" sz="1222" dirty="0"/>
+            <a:endParaRPr lang="en-US" sz="1598" dirty="0"/>
           </a:p>
         </p:txBody>
       </p:sp>
@@ -10118,7 +10118,7 @@
               <a:buNone/>
             </a:pPr>
             <a:r>
-              <a:rPr lang="en-US" sz="1022" dirty="0">
+              <a:rPr lang="en-US" sz="1398" dirty="0">
                 <a:solidFill>
                   <a:srgbClr val="5B6B78"/>
                 </a:solidFill>
@@ -10128,7 +10128,7 @@
               </a:rPr>
               <a:t>32 bytes</a:t>
             </a:r>
-            <a:endParaRPr lang="en-US" sz="1022" dirty="0"/>
+            <a:endParaRPr lang="en-US" sz="1398" dirty="0"/>
           </a:p>
         </p:txBody>
       </p:sp>
@@ -10157,7 +10157,7 @@
               <a:buNone/>
             </a:pPr>
             <a:r>
-              <a:rPr lang="en-US" sz="1222" dirty="0">
+              <a:rPr lang="en-US" sz="1598" dirty="0">
                 <a:solidFill>
                   <a:srgbClr val="1B2530"/>
                 </a:solidFill>
@@ -10167,7 +10167,7 @@
               </a:rPr>
               <a:t>what the menu shows</a:t>
             </a:r>
-            <a:endParaRPr lang="en-US" sz="1222" dirty="0"/>
+            <a:endParaRPr lang="en-US" sz="1598" dirty="0"/>
           </a:p>
         </p:txBody>
       </p:sp>
@@ -10196,7 +10196,7 @@
               <a:buNone/>
             </a:pPr>
             <a:r>
-              <a:rPr lang="en-US" sz="1022" dirty="0">
+              <a:rPr lang="en-US" sz="1398" dirty="0">
                 <a:solidFill>
                   <a:srgbClr val="5B6B78"/>
                 </a:solidFill>
@@ -10206,7 +10206,7 @@
               </a:rPr>
               <a:t>+72</a:t>
             </a:r>
-            <a:endParaRPr lang="en-US" sz="1022" dirty="0"/>
+            <a:endParaRPr lang="en-US" sz="1398" dirty="0"/>
           </a:p>
         </p:txBody>
       </p:sp>
@@ -10241,7 +10241,7 @@
               <a:buNone/>
             </a:pPr>
             <a:r>
-              <a:rPr lang="en-US" sz="1222" b="1" dirty="0">
+              <a:rPr lang="en-US" sz="1498" b="1" dirty="0">
                 <a:solidFill>
                   <a:srgbClr val="FFFFFF"/>
                 </a:solidFill>
@@ -10251,7 +10251,7 @@
               </a:rPr>
               <a:t>ABI hash, required features</a:t>
             </a:r>
-            <a:endParaRPr lang="en-US" sz="1222" dirty="0"/>
+            <a:endParaRPr lang="en-US" sz="1498" dirty="0"/>
           </a:p>
         </p:txBody>
       </p:sp>
@@ -10280,7 +10280,7 @@
               <a:buNone/>
             </a:pPr>
             <a:r>
-              <a:rPr lang="en-US" sz="1022" dirty="0">
+              <a:rPr lang="en-US" sz="1398" dirty="0">
                 <a:solidFill>
                   <a:srgbClr val="5B6B78"/>
                 </a:solidFill>
@@ -10290,7 +10290,7 @@
               </a:rPr>
               <a:t>28 bytes</a:t>
             </a:r>
-            <a:endParaRPr lang="en-US" sz="1022" dirty="0"/>
+            <a:endParaRPr lang="en-US" sz="1398" dirty="0"/>
           </a:p>
         </p:txBody>
       </p:sp>
@@ -10319,7 +10319,7 @@
               <a:buNone/>
             </a:pPr>
             <a:r>
-              <a:rPr lang="en-US" sz="1222" dirty="0">
+              <a:rPr lang="en-US" sz="1598" dirty="0">
                 <a:solidFill>
                   <a:srgbClr val="1B2530"/>
                 </a:solidFill>
@@ -10329,7 +10329,7 @@
               </a:rPr>
               <a:t>an incompatible cartridge is refused</a:t>
             </a:r>
-            <a:endParaRPr lang="en-US" sz="1222" dirty="0"/>
+            <a:endParaRPr lang="en-US" sz="1598" dirty="0"/>
           </a:p>
         </p:txBody>
       </p:sp>
@@ -10357,7 +10357,7 @@
             <a:pPr algn="r" indent="0" marL="0">
               <a:buNone/>
             </a:pPr>
-            <a:endParaRPr lang="en-US" sz="1022" dirty="0"/>
+            <a:endParaRPr lang="en-US" sz="1398" dirty="0"/>
           </a:p>
         </p:txBody>
       </p:sp>
@@ -10392,7 +10392,7 @@
               <a:buNone/>
             </a:pPr>
             <a:r>
-              <a:rPr lang="en-US" sz="1222" b="1" dirty="0">
+              <a:rPr lang="en-US" sz="1598" b="1" dirty="0">
                 <a:solidFill>
                   <a:srgbClr val="FFFFFF"/>
                 </a:solidFill>
@@ -10402,7 +10402,7 @@
               </a:rPr>
               <a:t>code and data</a:t>
             </a:r>
-            <a:endParaRPr lang="en-US" sz="1222" dirty="0"/>
+            <a:endParaRPr lang="en-US" sz="1598" dirty="0"/>
           </a:p>
         </p:txBody>
       </p:sp>
@@ -10431,7 +10431,7 @@
               <a:buNone/>
             </a:pPr>
             <a:r>
-              <a:rPr lang="en-US" sz="1022" dirty="0">
+              <a:rPr lang="en-US" sz="1398" dirty="0">
                 <a:solidFill>
                   <a:srgbClr val="5B6B78"/>
                 </a:solidFill>
@@ -10441,7 +10441,7 @@
               </a:rPr>
               <a:t>~3 KiB</a:t>
             </a:r>
-            <a:endParaRPr lang="en-US" sz="1022" dirty="0"/>
+            <a:endParaRPr lang="en-US" sz="1398" dirty="0"/>
           </a:p>
         </p:txBody>
       </p:sp>
@@ -10470,7 +10470,7 @@
               <a:buNone/>
             </a:pPr>
             <a:r>
-              <a:rPr lang="en-US" sz="1222" dirty="0">
+              <a:rPr lang="en-US" sz="1598" dirty="0">
                 <a:solidFill>
                   <a:srgbClr val="1B2530"/>
                 </a:solidFill>
@@ -10480,7 +10480,7 @@
               </a:rPr>
               <a:t>RISC-V instructions: ours</a:t>
             </a:r>
-            <a:endParaRPr lang="en-US" sz="1222" dirty="0"/>
+            <a:endParaRPr lang="en-US" sz="1598" dirty="0"/>
           </a:p>
         </p:txBody>
       </p:sp>
@@ -13728,7 +13728,7 @@
               <a:buNone/>
             </a:pPr>
             <a:r>
-              <a:rPr lang="en-US" sz="1200" dirty="0">
+              <a:rPr lang="en-US" sz="1250" dirty="0">
                 <a:solidFill>
                   <a:srgbClr val="E6EDF2"/>
                 </a:solidFill>
@@ -13738,14 +13738,14 @@
               </a:rPr>
               <a:t>hello_world_draw:</a:t>
             </a:r>
-            <a:endParaRPr lang="en-US" sz="1200" dirty="0"/>
+            <a:endParaRPr lang="en-US" sz="1250" dirty="0"/>
           </a:p>
           <a:p>
             <a:pPr indent="0" marL="0">
               <a:buNone/>
             </a:pPr>
             <a:r>
-              <a:rPr lang="en-US" sz="1200" dirty="0">
+              <a:rPr lang="en-US" sz="1250" dirty="0">
                 <a:solidFill>
                   <a:srgbClr val="E6EDF2"/>
                 </a:solidFill>
@@ -13755,14 +13755,14 @@
               </a:rPr>
               <a:t>    addi sp, sp, -16</a:t>
             </a:r>
-            <a:endParaRPr lang="en-US" sz="1200" dirty="0"/>
+            <a:endParaRPr lang="en-US" sz="1250" dirty="0"/>
           </a:p>
           <a:p>
             <a:pPr indent="0" marL="0">
               <a:buNone/>
             </a:pPr>
             <a:r>
-              <a:rPr lang="en-US" sz="1200" dirty="0">
+              <a:rPr lang="en-US" sz="1250" dirty="0">
                 <a:solidFill>
                   <a:srgbClr val="E6EDF2"/>
                 </a:solidFill>
@@ -13776,7 +13776,7 @@
               <a:buNone/>
             </a:pPr>
             <a:r>
-              <a:rPr lang="en-US" sz="1200" dirty="0">
+              <a:rPr lang="en-US" sz="1250" dirty="0">
                 <a:solidFill>
                   <a:srgbClr val="8FB3A0"/>
                 </a:solidFill>
@@ -13784,16 +13784,16 @@
                 <a:ea typeface="Courier New" pitchFamily="34" charset="-122"/>
                 <a:cs typeface="Courier New" pitchFamily="34" charset="-120"/>
               </a:rPr>
-              <a:t># this function calls others: save ra</a:t>
-            </a:r>
-            <a:endParaRPr lang="en-US" sz="1200" dirty="0"/>
+              <a:t># this function calls others: save</a:t>
+            </a:r>
+            <a:endParaRPr lang="en-US" sz="1250" dirty="0"/>
           </a:p>
           <a:p>
             <a:pPr indent="0" marL="0">
               <a:buNone/>
             </a:pPr>
             <a:r>
-              <a:rPr lang="en-US" sz="1200" dirty="0">
+              <a:rPr lang="en-US" sz="1250" dirty="0">
                 <a:solidFill>
                   <a:srgbClr val="E6EDF2"/>
                 </a:solidFill>
@@ -13801,16 +13801,16 @@
                 <a:ea typeface="Courier New" pitchFamily="34" charset="-122"/>
                 <a:cs typeface="Courier New" pitchFamily="34" charset="-120"/>
               </a:rPr>
-              <a:t> </a:t>
-            </a:r>
-            <a:endParaRPr lang="en-US" sz="1200" dirty="0"/>
+              <a:t>        ra</a:t>
+            </a:r>
+            <a:endParaRPr lang="en-US" sz="1250" dirty="0"/>
           </a:p>
           <a:p>
             <a:pPr indent="0" marL="0">
               <a:buNone/>
             </a:pPr>
             <a:r>
-              <a:rPr lang="en-US" sz="1200" dirty="0">
+              <a:rPr lang="en-US" sz="1250" dirty="0">
                 <a:solidFill>
                   <a:srgbClr val="E6EDF2"/>
                 </a:solidFill>
@@ -13818,16 +13818,16 @@
                 <a:ea typeface="Courier New" pitchFamily="34" charset="-122"/>
                 <a:cs typeface="Courier New" pitchFamily="34" charset="-120"/>
               </a:rPr>
-              <a:t>    li   a0, BLACK</a:t>
-            </a:r>
-            <a:endParaRPr lang="en-US" sz="1200" dirty="0"/>
+              <a:t> </a:t>
+            </a:r>
+            <a:endParaRPr lang="en-US" sz="1250" dirty="0"/>
           </a:p>
           <a:p>
             <a:pPr indent="0" marL="0">
               <a:buNone/>
             </a:pPr>
             <a:r>
-              <a:rPr lang="en-US" sz="1200" dirty="0">
+              <a:rPr lang="en-US" sz="1250" dirty="0">
                 <a:solidFill>
                   <a:srgbClr val="E6EDF2"/>
                 </a:solidFill>
@@ -13835,16 +13835,16 @@
                 <a:ea typeface="Courier New" pitchFamily="34" charset="-122"/>
                 <a:cs typeface="Courier New" pitchFamily="34" charset="-120"/>
               </a:rPr>
-              <a:t>    call prg32_gfx_clear</a:t>
-            </a:r>
-            <a:endParaRPr lang="en-US" sz="1200" dirty="0"/>
+              <a:t>    li   a0, BLACK</a:t>
+            </a:r>
+            <a:endParaRPr lang="en-US" sz="1250" dirty="0"/>
           </a:p>
           <a:p>
             <a:pPr indent="0" marL="0">
               <a:buNone/>
             </a:pPr>
             <a:r>
-              <a:rPr lang="en-US" sz="1200" dirty="0">
+              <a:rPr lang="en-US" sz="1250" dirty="0">
                 <a:solidFill>
                   <a:srgbClr val="E6EDF2"/>
                 </a:solidFill>
@@ -13852,16 +13852,16 @@
                 <a:ea typeface="Courier New" pitchFamily="34" charset="-122"/>
                 <a:cs typeface="Courier New" pitchFamily="34" charset="-120"/>
               </a:rPr>
-              <a:t> </a:t>
-            </a:r>
-            <a:endParaRPr lang="en-US" sz="1200" dirty="0"/>
+              <a:t>    call prg32_gfx_clear</a:t>
+            </a:r>
+            <a:endParaRPr lang="en-US" sz="1250" dirty="0"/>
           </a:p>
           <a:p>
             <a:pPr indent="0" marL="0">
               <a:buNone/>
             </a:pPr>
             <a:r>
-              <a:rPr lang="en-US" sz="1200" dirty="0">
+              <a:rPr lang="en-US" sz="1250" dirty="0">
                 <a:solidFill>
                   <a:srgbClr val="E6EDF2"/>
                 </a:solidFill>
@@ -13869,171 +13869,171 @@
                 <a:ea typeface="Courier New" pitchFamily="34" charset="-122"/>
                 <a:cs typeface="Courier New" pitchFamily="34" charset="-120"/>
               </a:rPr>
-              <a:t>    li   a0, 32                </a:t>
-            </a:r>
+              <a:t> </a:t>
+            </a:r>
+            <a:endParaRPr lang="en-US" sz="1250" dirty="0"/>
+          </a:p>
+          <a:p>
             <a:pPr indent="0" marL="0">
               <a:buNone/>
             </a:pPr>
             <a:r>
-              <a:rPr lang="en-US" sz="1200" dirty="0">
-                <a:solidFill>
-                  <a:srgbClr val="8FB3A0"/>
+              <a:rPr lang="en-US" sz="1250" dirty="0">
+                <a:solidFill>
+                  <a:srgbClr val="E6EDF2"/>
                 </a:solidFill>
                 <a:latin typeface="Courier New" pitchFamily="34" charset="0"/>
                 <a:ea typeface="Courier New" pitchFamily="34" charset="-122"/>
                 <a:cs typeface="Courier New" pitchFamily="34" charset="-120"/>
               </a:rPr>
-              <a:t># x</a:t>
-            </a:r>
-            <a:endParaRPr lang="en-US" sz="1200" dirty="0"/>
-          </a:p>
-          <a:p>
+              <a:t>    li   a0, 32                </a:t>
+            </a:r>
             <a:pPr indent="0" marL="0">
               <a:buNone/>
             </a:pPr>
             <a:r>
-              <a:rPr lang="en-US" sz="1200" dirty="0">
-                <a:solidFill>
-                  <a:srgbClr val="E6EDF2"/>
+              <a:rPr lang="en-US" sz="1250" dirty="0">
+                <a:solidFill>
+                  <a:srgbClr val="8FB3A0"/>
                 </a:solidFill>
                 <a:latin typeface="Courier New" pitchFamily="34" charset="0"/>
                 <a:ea typeface="Courier New" pitchFamily="34" charset="-122"/>
                 <a:cs typeface="Courier New" pitchFamily="34" charset="-120"/>
               </a:rPr>
-              <a:t>    li   a1, 40                </a:t>
-            </a:r>
+              <a:t># x</a:t>
+            </a:r>
+            <a:endParaRPr lang="en-US" sz="1250" dirty="0"/>
+          </a:p>
+          <a:p>
             <a:pPr indent="0" marL="0">
               <a:buNone/>
             </a:pPr>
             <a:r>
-              <a:rPr lang="en-US" sz="1200" dirty="0">
-                <a:solidFill>
-                  <a:srgbClr val="8FB3A0"/>
+              <a:rPr lang="en-US" sz="1250" dirty="0">
+                <a:solidFill>
+                  <a:srgbClr val="E6EDF2"/>
                 </a:solidFill>
                 <a:latin typeface="Courier New" pitchFamily="34" charset="0"/>
                 <a:ea typeface="Courier New" pitchFamily="34" charset="-122"/>
                 <a:cs typeface="Courier New" pitchFamily="34" charset="-120"/>
               </a:rPr>
-              <a:t># y</a:t>
-            </a:r>
-            <a:endParaRPr lang="en-US" sz="1200" dirty="0"/>
-          </a:p>
-          <a:p>
+              <a:t>    li   a1, 40                </a:t>
+            </a:r>
             <a:pPr indent="0" marL="0">
               <a:buNone/>
             </a:pPr>
             <a:r>
-              <a:rPr lang="en-US" sz="1200" dirty="0">
-                <a:solidFill>
-                  <a:srgbClr val="E6EDF2"/>
+              <a:rPr lang="en-US" sz="1250" dirty="0">
+                <a:solidFill>
+                  <a:srgbClr val="8FB3A0"/>
                 </a:solidFill>
                 <a:latin typeface="Courier New" pitchFamily="34" charset="0"/>
                 <a:ea typeface="Courier New" pitchFamily="34" charset="-122"/>
                 <a:cs typeface="Courier New" pitchFamily="34" charset="-120"/>
               </a:rPr>
-              <a:t>    la   a2, title             </a:t>
-            </a:r>
+              <a:t># y</a:t>
+            </a:r>
+            <a:endParaRPr lang="en-US" sz="1250" dirty="0"/>
+          </a:p>
+          <a:p>
             <a:pPr indent="0" marL="0">
               <a:buNone/>
             </a:pPr>
             <a:r>
-              <a:rPr lang="en-US" sz="1200" dirty="0">
-                <a:solidFill>
-                  <a:srgbClr val="8FB3A0"/>
+              <a:rPr lang="en-US" sz="1250" dirty="0">
+                <a:solidFill>
+                  <a:srgbClr val="E6EDF2"/>
                 </a:solidFill>
                 <a:latin typeface="Courier New" pitchFamily="34" charset="0"/>
                 <a:ea typeface="Courier New" pitchFamily="34" charset="-122"/>
                 <a:cs typeface="Courier New" pitchFamily="34" charset="-120"/>
               </a:rPr>
-              <a:t># address of the string</a:t>
-            </a:r>
-            <a:endParaRPr lang="en-US" sz="1200" dirty="0"/>
-          </a:p>
-          <a:p>
+              <a:t>    la   a2, title             </a:t>
+            </a:r>
             <a:pPr indent="0" marL="0">
               <a:buNone/>
             </a:pPr>
             <a:r>
-              <a:rPr lang="en-US" sz="1200" dirty="0">
-                <a:solidFill>
-                  <a:srgbClr val="E6EDF2"/>
+              <a:rPr lang="en-US" sz="1250" dirty="0">
+                <a:solidFill>
+                  <a:srgbClr val="8FB3A0"/>
                 </a:solidFill>
                 <a:latin typeface="Courier New" pitchFamily="34" charset="0"/>
                 <a:ea typeface="Courier New" pitchFamily="34" charset="-122"/>
                 <a:cs typeface="Courier New" pitchFamily="34" charset="-120"/>
               </a:rPr>
-              <a:t>    li   a3, CYAN              </a:t>
-            </a:r>
+              <a:t># address of the string</a:t>
+            </a:r>
+            <a:endParaRPr lang="en-US" sz="1250" dirty="0"/>
+          </a:p>
+          <a:p>
             <a:pPr indent="0" marL="0">
               <a:buNone/>
             </a:pPr>
             <a:r>
-              <a:rPr lang="en-US" sz="1200" dirty="0">
-                <a:solidFill>
-                  <a:srgbClr val="8FB3A0"/>
+              <a:rPr lang="en-US" sz="1250" dirty="0">
+                <a:solidFill>
+                  <a:srgbClr val="E6EDF2"/>
                 </a:solidFill>
                 <a:latin typeface="Courier New" pitchFamily="34" charset="0"/>
                 <a:ea typeface="Courier New" pitchFamily="34" charset="-122"/>
                 <a:cs typeface="Courier New" pitchFamily="34" charset="-120"/>
               </a:rPr>
-              <a:t># foreground colour</a:t>
-            </a:r>
-            <a:endParaRPr lang="en-US" sz="1200" dirty="0"/>
-          </a:p>
-          <a:p>
+              <a:t>    li   a3, CYAN              </a:t>
+            </a:r>
             <a:pPr indent="0" marL="0">
               <a:buNone/>
             </a:pPr>
             <a:r>
-              <a:rPr lang="en-US" sz="1200" dirty="0">
-                <a:solidFill>
-                  <a:srgbClr val="E6EDF2"/>
+              <a:rPr lang="en-US" sz="1250" dirty="0">
+                <a:solidFill>
+                  <a:srgbClr val="8FB3A0"/>
                 </a:solidFill>
                 <a:latin typeface="Courier New" pitchFamily="34" charset="0"/>
                 <a:ea typeface="Courier New" pitchFamily="34" charset="-122"/>
                 <a:cs typeface="Courier New" pitchFamily="34" charset="-120"/>
               </a:rPr>
-              <a:t>    li   a4, BLACK             </a:t>
-            </a:r>
+              <a:t># foreground colour</a:t>
+            </a:r>
+            <a:endParaRPr lang="en-US" sz="1250" dirty="0"/>
+          </a:p>
+          <a:p>
             <a:pPr indent="0" marL="0">
               <a:buNone/>
             </a:pPr>
             <a:r>
-              <a:rPr lang="en-US" sz="1200" dirty="0">
-                <a:solidFill>
-                  <a:srgbClr val="8FB3A0"/>
+              <a:rPr lang="en-US" sz="1250" dirty="0">
+                <a:solidFill>
+                  <a:srgbClr val="E6EDF2"/>
                 </a:solidFill>
                 <a:latin typeface="Courier New" pitchFamily="34" charset="0"/>
                 <a:ea typeface="Courier New" pitchFamily="34" charset="-122"/>
                 <a:cs typeface="Courier New" pitchFamily="34" charset="-120"/>
               </a:rPr>
-              <a:t># background colour</a:t>
-            </a:r>
-            <a:endParaRPr lang="en-US" sz="1200" dirty="0"/>
-          </a:p>
-          <a:p>
+              <a:t>    li   a4, BLACK             </a:t>
+            </a:r>
             <a:pPr indent="0" marL="0">
               <a:buNone/>
             </a:pPr>
             <a:r>
-              <a:rPr lang="en-US" sz="1200" dirty="0">
-                <a:solidFill>
-                  <a:srgbClr val="E6EDF2"/>
+              <a:rPr lang="en-US" sz="1250" dirty="0">
+                <a:solidFill>
+                  <a:srgbClr val="8FB3A0"/>
                 </a:solidFill>
                 <a:latin typeface="Courier New" pitchFamily="34" charset="0"/>
                 <a:ea typeface="Courier New" pitchFamily="34" charset="-122"/>
                 <a:cs typeface="Courier New" pitchFamily="34" charset="-120"/>
               </a:rPr>
-              <a:t>    call prg32_gfx_text8</a:t>
-            </a:r>
-            <a:endParaRPr lang="en-US" sz="1200" dirty="0"/>
+              <a:t># background colour</a:t>
+            </a:r>
+            <a:endParaRPr lang="en-US" sz="1250" dirty="0"/>
           </a:p>
           <a:p>
             <a:pPr indent="0" marL="0">
               <a:buNone/>
             </a:pPr>
             <a:r>
-              <a:rPr lang="en-US" sz="1200" dirty="0">
+              <a:rPr lang="en-US" sz="1250" dirty="0">
                 <a:solidFill>
                   <a:srgbClr val="E6EDF2"/>
                 </a:solidFill>
@@ -14041,16 +14041,16 @@
                 <a:ea typeface="Courier New" pitchFamily="34" charset="-122"/>
                 <a:cs typeface="Courier New" pitchFamily="34" charset="-120"/>
               </a:rPr>
-              <a:t> </a:t>
-            </a:r>
-            <a:endParaRPr lang="en-US" sz="1200" dirty="0"/>
+              <a:t>    call prg32_gfx_text8</a:t>
+            </a:r>
+            <a:endParaRPr lang="en-US" sz="1250" dirty="0"/>
           </a:p>
           <a:p>
             <a:pPr indent="0" marL="0">
               <a:buNone/>
             </a:pPr>
             <a:r>
-              <a:rPr lang="en-US" sz="1200" dirty="0">
+              <a:rPr lang="en-US" sz="1250" dirty="0">
                 <a:solidFill>
                   <a:srgbClr val="E6EDF2"/>
                 </a:solidFill>
@@ -14058,9 +14058,26 @@
                 <a:ea typeface="Courier New" pitchFamily="34" charset="-122"/>
                 <a:cs typeface="Courier New" pitchFamily="34" charset="-120"/>
               </a:rPr>
+              <a:t> </a:t>
+            </a:r>
+            <a:endParaRPr lang="en-US" sz="1250" dirty="0"/>
+          </a:p>
+          <a:p>
+            <a:pPr indent="0" marL="0">
+              <a:buNone/>
+            </a:pPr>
+            <a:r>
+              <a:rPr lang="en-US" sz="1250" dirty="0">
+                <a:solidFill>
+                  <a:srgbClr val="E6EDF2"/>
+                </a:solidFill>
+                <a:latin typeface="Courier New" pitchFamily="34" charset="0"/>
+                <a:ea typeface="Courier New" pitchFamily="34" charset="-122"/>
+                <a:cs typeface="Courier New" pitchFamily="34" charset="-120"/>
+              </a:rPr>
               <a:t>    lw   ra, 12(sp)</a:t>
             </a:r>
-            <a:endParaRPr lang="en-US" sz="1200" dirty="0"/>
+            <a:endParaRPr lang="en-US" sz="1250" dirty="0"/>
           </a:p>
         </p:txBody>
       </p:sp>
@@ -27085,7 +27102,7 @@
               <a:buNone/>
             </a:pPr>
             <a:r>
-              <a:rPr lang="en-US" sz="1150" dirty="0">
+              <a:rPr lang="en-US" sz="1250" dirty="0">
                 <a:solidFill>
                   <a:srgbClr val="E6EDF2"/>
                 </a:solidFill>
@@ -27099,7 +27116,7 @@
               <a:buNone/>
             </a:pPr>
             <a:r>
-              <a:rPr lang="en-US" sz="1150" dirty="0">
+              <a:rPr lang="en-US" sz="1250" dirty="0">
                 <a:solidFill>
                   <a:srgbClr val="8FB3A0"/>
                 </a:solidFill>
@@ -27109,14 +27126,14 @@
               </a:rPr>
               <a:t># --- paddle collision</a:t>
             </a:r>
-            <a:endParaRPr lang="en-US" sz="1150" dirty="0"/>
+            <a:endParaRPr lang="en-US" sz="1250" dirty="0"/>
           </a:p>
           <a:p>
             <a:pPr indent="0" marL="0">
               <a:buNone/>
             </a:pPr>
             <a:r>
-              <a:rPr lang="en-US" sz="1150" dirty="0">
+              <a:rPr lang="en-US" sz="1250" dirty="0">
                 <a:solidFill>
                   <a:srgbClr val="E6EDF2"/>
                 </a:solidFill>
@@ -27126,14 +27143,14 @@
               </a:rPr>
               <a:t>    la   t0, ball_x</a:t>
             </a:r>
-            <a:endParaRPr lang="en-US" sz="1150" dirty="0"/>
+            <a:endParaRPr lang="en-US" sz="1250" dirty="0"/>
           </a:p>
           <a:p>
             <a:pPr indent="0" marL="0">
               <a:buNone/>
             </a:pPr>
             <a:r>
-              <a:rPr lang="en-US" sz="1150" dirty="0">
+              <a:rPr lang="en-US" sz="1250" dirty="0">
                 <a:solidFill>
                   <a:srgbClr val="E6EDF2"/>
                 </a:solidFill>
@@ -27147,7 +27164,7 @@
               <a:buNone/>
             </a:pPr>
             <a:r>
-              <a:rPr lang="en-US" sz="1150" dirty="0">
+              <a:rPr lang="en-US" sz="1250" dirty="0">
                 <a:solidFill>
                   <a:srgbClr val="8FB3A0"/>
                 </a:solidFill>
@@ -27157,14 +27174,14 @@
               </a:rPr>
               <a:t># a0..a3: the ball rectangle</a:t>
             </a:r>
-            <a:endParaRPr lang="en-US" sz="1150" dirty="0"/>
+            <a:endParaRPr lang="en-US" sz="1250" dirty="0"/>
           </a:p>
           <a:p>
             <a:pPr indent="0" marL="0">
               <a:buNone/>
             </a:pPr>
             <a:r>
-              <a:rPr lang="en-US" sz="1150" dirty="0">
+              <a:rPr lang="en-US" sz="1250" dirty="0">
                 <a:solidFill>
                   <a:srgbClr val="E6EDF2"/>
                 </a:solidFill>
@@ -27174,14 +27191,14 @@
               </a:rPr>
               <a:t>    la   t0, ball_y</a:t>
             </a:r>
-            <a:endParaRPr lang="en-US" sz="1150" dirty="0"/>
+            <a:endParaRPr lang="en-US" sz="1250" dirty="0"/>
           </a:p>
           <a:p>
             <a:pPr indent="0" marL="0">
               <a:buNone/>
             </a:pPr>
             <a:r>
-              <a:rPr lang="en-US" sz="1150" dirty="0">
+              <a:rPr lang="en-US" sz="1250" dirty="0">
                 <a:solidFill>
                   <a:srgbClr val="E6EDF2"/>
                 </a:solidFill>
@@ -27191,14 +27208,14 @@
               </a:rPr>
               <a:t>    lw   a1, 0(t0)</a:t>
             </a:r>
-            <a:endParaRPr lang="en-US" sz="1150" dirty="0"/>
+            <a:endParaRPr lang="en-US" sz="1250" dirty="0"/>
           </a:p>
           <a:p>
             <a:pPr indent="0" marL="0">
               <a:buNone/>
             </a:pPr>
             <a:r>
-              <a:rPr lang="en-US" sz="1150" dirty="0">
+              <a:rPr lang="en-US" sz="1250" dirty="0">
                 <a:solidFill>
                   <a:srgbClr val="E6EDF2"/>
                 </a:solidFill>
@@ -27208,14 +27225,14 @@
               </a:rPr>
               <a:t>    li   a2, BALL_SIZE</a:t>
             </a:r>
-            <a:endParaRPr lang="en-US" sz="1150" dirty="0"/>
+            <a:endParaRPr lang="en-US" sz="1250" dirty="0"/>
           </a:p>
           <a:p>
             <a:pPr indent="0" marL="0">
               <a:buNone/>
             </a:pPr>
             <a:r>
-              <a:rPr lang="en-US" sz="1150" dirty="0">
+              <a:rPr lang="en-US" sz="1250" dirty="0">
                 <a:solidFill>
                   <a:srgbClr val="E6EDF2"/>
                 </a:solidFill>
@@ -27225,14 +27242,14 @@
               </a:rPr>
               <a:t>    li   a3, BALL_SIZE</a:t>
             </a:r>
-            <a:endParaRPr lang="en-US" sz="1150" dirty="0"/>
+            <a:endParaRPr lang="en-US" sz="1250" dirty="0"/>
           </a:p>
           <a:p>
             <a:pPr indent="0" marL="0">
               <a:buNone/>
             </a:pPr>
             <a:r>
-              <a:rPr lang="en-US" sz="1150" dirty="0">
+              <a:rPr lang="en-US" sz="1250" dirty="0">
                 <a:solidFill>
                   <a:srgbClr val="E6EDF2"/>
                 </a:solidFill>
@@ -27242,14 +27259,14 @@
               </a:rPr>
               <a:t>    la   t0, paddle_x</a:t>
             </a:r>
-            <a:endParaRPr lang="en-US" sz="1150" dirty="0"/>
+            <a:endParaRPr lang="en-US" sz="1250" dirty="0"/>
           </a:p>
           <a:p>
             <a:pPr indent="0" marL="0">
               <a:buNone/>
             </a:pPr>
             <a:r>
-              <a:rPr lang="en-US" sz="1150" dirty="0">
+              <a:rPr lang="en-US" sz="1250" dirty="0">
                 <a:solidFill>
                   <a:srgbClr val="E6EDF2"/>
                 </a:solidFill>
@@ -27263,7 +27280,7 @@
               <a:buNone/>
             </a:pPr>
             <a:r>
-              <a:rPr lang="en-US" sz="1150" dirty="0">
+              <a:rPr lang="en-US" sz="1250" dirty="0">
                 <a:solidFill>
                   <a:srgbClr val="8FB3A0"/>
                 </a:solidFill>
@@ -27273,14 +27290,14 @@
               </a:rPr>
               <a:t># a4..a7: the paddle rectangle</a:t>
             </a:r>
-            <a:endParaRPr lang="en-US" sz="1150" dirty="0"/>
+            <a:endParaRPr lang="en-US" sz="1250" dirty="0"/>
           </a:p>
           <a:p>
             <a:pPr indent="0" marL="0">
               <a:buNone/>
             </a:pPr>
             <a:r>
-              <a:rPr lang="en-US" sz="1150" dirty="0">
+              <a:rPr lang="en-US" sz="1250" dirty="0">
                 <a:solidFill>
                   <a:srgbClr val="E6EDF2"/>
                 </a:solidFill>
@@ -27290,14 +27307,14 @@
               </a:rPr>
               <a:t>    li   a5, PADDLE_Y</a:t>
             </a:r>
-            <a:endParaRPr lang="en-US" sz="1150" dirty="0"/>
+            <a:endParaRPr lang="en-US" sz="1250" dirty="0"/>
           </a:p>
           <a:p>
             <a:pPr indent="0" marL="0">
               <a:buNone/>
             </a:pPr>
             <a:r>
-              <a:rPr lang="en-US" sz="1150" dirty="0">
+              <a:rPr lang="en-US" sz="1250" dirty="0">
                 <a:solidFill>
                   <a:srgbClr val="E6EDF2"/>
                 </a:solidFill>
@@ -27307,14 +27324,14 @@
               </a:rPr>
               <a:t>    li   a6, PADDLE_W</a:t>
             </a:r>
-            <a:endParaRPr lang="en-US" sz="1150" dirty="0"/>
+            <a:endParaRPr lang="en-US" sz="1250" dirty="0"/>
           </a:p>
           <a:p>
             <a:pPr indent="0" marL="0">
               <a:buNone/>
             </a:pPr>
             <a:r>
-              <a:rPr lang="en-US" sz="1150" dirty="0">
+              <a:rPr lang="en-US" sz="1250" dirty="0">
                 <a:solidFill>
                   <a:srgbClr val="E6EDF2"/>
                 </a:solidFill>
@@ -27324,14 +27341,14 @@
               </a:rPr>
               <a:t>    li   a7, PADDLE_H</a:t>
             </a:r>
-            <a:endParaRPr lang="en-US" sz="1150" dirty="0"/>
+            <a:endParaRPr lang="en-US" sz="1250" dirty="0"/>
           </a:p>
           <a:p>
             <a:pPr indent="0" marL="0">
               <a:buNone/>
             </a:pPr>
             <a:r>
-              <a:rPr lang="en-US" sz="1150" dirty="0">
+              <a:rPr lang="en-US" sz="1250" dirty="0">
                 <a:solidFill>
                   <a:srgbClr val="E6EDF2"/>
                 </a:solidFill>
@@ -27345,7 +27362,7 @@
               <a:buNone/>
             </a:pPr>
             <a:r>
-              <a:rPr lang="en-US" sz="1150" dirty="0">
+              <a:rPr lang="en-US" sz="1250" dirty="0">
                 <a:solidFill>
                   <a:srgbClr val="8FB3A0"/>
                 </a:solidFill>
@@ -27355,14 +27372,14 @@
               </a:rPr>
               <a:t># a0 = non-zero if they overlap</a:t>
             </a:r>
-            <a:endParaRPr lang="en-US" sz="1150" dirty="0"/>
+            <a:endParaRPr lang="en-US" sz="1250" dirty="0"/>
           </a:p>
           <a:p>
             <a:pPr indent="0" marL="0">
               <a:buNone/>
             </a:pPr>
             <a:r>
-              <a:rPr lang="en-US" sz="1150" dirty="0">
+              <a:rPr lang="en-US" sz="1250" dirty="0">
                 <a:solidFill>
                   <a:srgbClr val="E6EDF2"/>
                 </a:solidFill>
@@ -27372,14 +27389,14 @@
               </a:rPr>
               <a:t>    beqz a0, update_done</a:t>
             </a:r>
-            <a:endParaRPr lang="en-US" sz="1150" dirty="0"/>
+            <a:endParaRPr lang="en-US" sz="1250" dirty="0"/>
           </a:p>
           <a:p>
             <a:pPr indent="0" marL="0">
               <a:buNone/>
             </a:pPr>
             <a:r>
-              <a:rPr lang="en-US" sz="1150" dirty="0">
+              <a:rPr lang="en-US" sz="1250" dirty="0">
                 <a:solidFill>
                   <a:srgbClr val="E6EDF2"/>
                 </a:solidFill>
@@ -27389,14 +27406,14 @@
               </a:rPr>
               <a:t>    la   t0, ball_dy</a:t>
             </a:r>
-            <a:endParaRPr lang="en-US" sz="1150" dirty="0"/>
+            <a:endParaRPr lang="en-US" sz="1250" dirty="0"/>
           </a:p>
           <a:p>
             <a:pPr indent="0" marL="0">
               <a:buNone/>
             </a:pPr>
             <a:r>
-              <a:rPr lang="en-US" sz="1150" dirty="0">
+              <a:rPr lang="en-US" sz="1250" dirty="0">
                 <a:solidFill>
                   <a:srgbClr val="E6EDF2"/>
                 </a:solidFill>
@@ -27406,14 +27423,14 @@
               </a:rPr>
               <a:t>    lw   t1, 0(t0)</a:t>
             </a:r>
-            <a:endParaRPr lang="en-US" sz="1150" dirty="0"/>
+            <a:endParaRPr lang="en-US" sz="1250" dirty="0"/>
           </a:p>
           <a:p>
             <a:pPr indent="0" marL="0">
               <a:buNone/>
             </a:pPr>
             <a:r>
-              <a:rPr lang="en-US" sz="1150" dirty="0">
+              <a:rPr lang="en-US" sz="1250" dirty="0">
                 <a:solidFill>
                   <a:srgbClr val="E6EDF2"/>
                 </a:solidFill>
@@ -27427,7 +27444,7 @@
               <a:buNone/>
             </a:pPr>
             <a:r>
-              <a:rPr lang="en-US" sz="1150" dirty="0">
+              <a:rPr lang="en-US" sz="1250" dirty="0">
                 <a:solidFill>
                   <a:srgbClr val="8FB3A0"/>
                 </a:solidFill>
@@ -27435,16 +27452,16 @@
                 <a:ea typeface="Courier New" pitchFamily="34" charset="-122"/>
                 <a:cs typeface="Courier New" pitchFamily="34" charset="-120"/>
               </a:rPr>
-              <a:t># guard: bounce only while moving down</a:t>
-            </a:r>
-            <a:endParaRPr lang="en-US" sz="1150" dirty="0"/>
+              <a:t># guard: bounce only while moving</a:t>
+            </a:r>
+            <a:endParaRPr lang="en-US" sz="1250" dirty="0"/>
           </a:p>
           <a:p>
             <a:pPr indent="0" marL="0">
               <a:buNone/>
             </a:pPr>
             <a:r>
-              <a:rPr lang="en-US" sz="1150" dirty="0">
+              <a:rPr lang="en-US" sz="1250" dirty="0">
                 <a:solidFill>
                   <a:srgbClr val="E6EDF2"/>
                 </a:solidFill>
@@ -27452,16 +27469,16 @@
                 <a:ea typeface="Courier New" pitchFamily="34" charset="-122"/>
                 <a:cs typeface="Courier New" pitchFamily="34" charset="-120"/>
               </a:rPr>
-              <a:t>    neg  t1, t1</a:t>
-            </a:r>
-            <a:endParaRPr lang="en-US" sz="1150" dirty="0"/>
+              <a:t>        down</a:t>
+            </a:r>
+            <a:endParaRPr lang="en-US" sz="1250" dirty="0"/>
           </a:p>
           <a:p>
             <a:pPr indent="0" marL="0">
               <a:buNone/>
             </a:pPr>
             <a:r>
-              <a:rPr lang="en-US" sz="1150" dirty="0">
+              <a:rPr lang="en-US" sz="1250" dirty="0">
                 <a:solidFill>
                   <a:srgbClr val="E6EDF2"/>
                 </a:solidFill>
@@ -27469,9 +27486,26 @@
                 <a:ea typeface="Courier New" pitchFamily="34" charset="-122"/>
                 <a:cs typeface="Courier New" pitchFamily="34" charset="-120"/>
               </a:rPr>
+              <a:t>    neg  t1, t1</a:t>
+            </a:r>
+            <a:endParaRPr lang="en-US" sz="1250" dirty="0"/>
+          </a:p>
+          <a:p>
+            <a:pPr indent="0" marL="0">
+              <a:buNone/>
+            </a:pPr>
+            <a:r>
+              <a:rPr lang="en-US" sz="1250" dirty="0">
+                <a:solidFill>
+                  <a:srgbClr val="E6EDF2"/>
+                </a:solidFill>
+                <a:latin typeface="Courier New" pitchFamily="34" charset="0"/>
+                <a:ea typeface="Courier New" pitchFamily="34" charset="-122"/>
+                <a:cs typeface="Courier New" pitchFamily="34" charset="-120"/>
+              </a:rPr>
               <a:t>    sw   t1, 0(t0)</a:t>
             </a:r>
-            <a:endParaRPr lang="en-US" sz="1150" dirty="0"/>
+            <a:endParaRPr lang="en-US" sz="1250" dirty="0"/>
           </a:p>
         </p:txBody>
       </p:sp>
@@ -29051,7 +29085,7 @@
               <a:buNone/>
             </a:pPr>
             <a:r>
-              <a:rPr lang="en-US" sz="1150" dirty="0">
+              <a:rPr lang="en-US" sz="1250" dirty="0">
                 <a:solidFill>
                   <a:srgbClr val="E6EDF2"/>
                 </a:solidFill>
@@ -29065,7 +29099,7 @@
               <a:buNone/>
             </a:pPr>
             <a:r>
-              <a:rPr lang="en-US" sz="1150" dirty="0">
+              <a:rPr lang="en-US" sz="1250" dirty="0">
                 <a:solidFill>
                   <a:srgbClr val="8FB3A0"/>
                 </a:solidFill>
@@ -29075,14 +29109,14 @@
               </a:rPr>
               <a:t># channel</a:t>
             </a:r>
-            <a:endParaRPr lang="en-US" sz="1150" dirty="0"/>
+            <a:endParaRPr lang="en-US" sz="1250" dirty="0"/>
           </a:p>
           <a:p>
             <a:pPr indent="0" marL="0">
               <a:buNone/>
             </a:pPr>
             <a:r>
-              <a:rPr lang="en-US" sz="1150" dirty="0">
+              <a:rPr lang="en-US" sz="1250" dirty="0">
                 <a:solidFill>
                   <a:srgbClr val="E6EDF2"/>
                 </a:solidFill>
@@ -29096,7 +29130,7 @@
               <a:buNone/>
             </a:pPr>
             <a:r>
-              <a:rPr lang="en-US" sz="1150" dirty="0">
+              <a:rPr lang="en-US" sz="1250" dirty="0">
                 <a:solidFill>
                   <a:srgbClr val="8FB3A0"/>
                 </a:solidFill>
@@ -29106,14 +29140,14 @@
               </a:rPr>
               <a:t># instrument</a:t>
             </a:r>
-            <a:endParaRPr lang="en-US" sz="1150" dirty="0"/>
+            <a:endParaRPr lang="en-US" sz="1250" dirty="0"/>
           </a:p>
           <a:p>
             <a:pPr indent="0" marL="0">
               <a:buNone/>
             </a:pPr>
             <a:r>
-              <a:rPr lang="en-US" sz="1150" dirty="0">
+              <a:rPr lang="en-US" sz="1250" dirty="0">
                 <a:solidFill>
                   <a:srgbClr val="E6EDF2"/>
                 </a:solidFill>
@@ -29127,7 +29161,7 @@
               <a:buNone/>
             </a:pPr>
             <a:r>
-              <a:rPr lang="en-US" sz="1150" dirty="0">
+              <a:rPr lang="en-US" sz="1250" dirty="0">
                 <a:solidFill>
                   <a:srgbClr val="8FB3A0"/>
                 </a:solidFill>
@@ -29137,14 +29171,14 @@
               </a:rPr>
               <a:t># MIDI note 72 = C5</a:t>
             </a:r>
-            <a:endParaRPr lang="en-US" sz="1150" dirty="0"/>
+            <a:endParaRPr lang="en-US" sz="1250" dirty="0"/>
           </a:p>
           <a:p>
             <a:pPr indent="0" marL="0">
               <a:buNone/>
             </a:pPr>
             <a:r>
-              <a:rPr lang="en-US" sz="1150" dirty="0">
+              <a:rPr lang="en-US" sz="1250" dirty="0">
                 <a:solidFill>
                   <a:srgbClr val="E6EDF2"/>
                 </a:solidFill>
@@ -29158,7 +29192,7 @@
               <a:buNone/>
             </a:pPr>
             <a:r>
-              <a:rPr lang="en-US" sz="1150" dirty="0">
+              <a:rPr lang="en-US" sz="1250" dirty="0">
                 <a:solidFill>
                   <a:srgbClr val="8FB3A0"/>
                 </a:solidFill>
@@ -29168,14 +29202,14 @@
               </a:rPr>
               <a:t># volume</a:t>
             </a:r>
-            <a:endParaRPr lang="en-US" sz="1150" dirty="0"/>
+            <a:endParaRPr lang="en-US" sz="1250" dirty="0"/>
           </a:p>
           <a:p>
             <a:pPr indent="0" marL="0">
               <a:buNone/>
             </a:pPr>
             <a:r>
-              <a:rPr lang="en-US" sz="1150" dirty="0">
+              <a:rPr lang="en-US" sz="1250" dirty="0">
                 <a:solidFill>
                   <a:srgbClr val="E6EDF2"/>
                 </a:solidFill>
@@ -29189,7 +29223,7 @@
               <a:buNone/>
             </a:pPr>
             <a:r>
-              <a:rPr lang="en-US" sz="1150" dirty="0">
+              <a:rPr lang="en-US" sz="1250" dirty="0">
                 <a:solidFill>
                   <a:srgbClr val="8FB3A0"/>
                 </a:solidFill>
@@ -29199,14 +29233,14 @@
               </a:rPr>
               <a:t># milliseconds</a:t>
             </a:r>
-            <a:endParaRPr lang="en-US" sz="1150" dirty="0"/>
+            <a:endParaRPr lang="en-US" sz="1250" dirty="0"/>
           </a:p>
           <a:p>
             <a:pPr indent="0" marL="0">
               <a:buNone/>
             </a:pPr>
             <a:r>
-              <a:rPr lang="en-US" sz="1150" dirty="0">
+              <a:rPr lang="en-US" sz="1250" dirty="0">
                 <a:solidFill>
                   <a:srgbClr val="E6EDF2"/>
                 </a:solidFill>
@@ -29220,7 +29254,7 @@
               <a:buNone/>
             </a:pPr>
             <a:r>
-              <a:rPr lang="en-US" sz="1150" dirty="0">
+              <a:rPr lang="en-US" sz="1250" dirty="0">
                 <a:solidFill>
                   <a:srgbClr val="8FB3A0"/>
                 </a:solidFill>
@@ -29228,9 +29262,26 @@
                 <a:ea typeface="Courier New" pitchFamily="34" charset="-122"/>
                 <a:cs typeface="Courier New" pitchFamily="34" charset="-120"/>
               </a:rPr>
-              <a:t># t registers are dead after this call</a:t>
-            </a:r>
-            <a:endParaRPr lang="en-US" sz="1150" dirty="0"/>
+              <a:t># t registers are dead after this</a:t>
+            </a:r>
+            <a:endParaRPr lang="en-US" sz="1250" dirty="0"/>
+          </a:p>
+          <a:p>
+            <a:pPr indent="0" marL="0">
+              <a:buNone/>
+            </a:pPr>
+            <a:r>
+              <a:rPr lang="en-US" sz="1250" dirty="0">
+                <a:solidFill>
+                  <a:srgbClr val="E6EDF2"/>
+                </a:solidFill>
+                <a:latin typeface="Courier New" pitchFamily="34" charset="0"/>
+                <a:ea typeface="Courier New" pitchFamily="34" charset="-122"/>
+                <a:cs typeface="Courier New" pitchFamily="34" charset="-120"/>
+              </a:rPr>
+              <a:t>        call</a:t>
+            </a:r>
+            <a:endParaRPr lang="en-US" sz="1250" dirty="0"/>
           </a:p>
         </p:txBody>
       </p:sp>
@@ -33298,7 +33349,7 @@
               <a:buNone/>
             </a:pPr>
             <a:r>
-              <a:rPr lang="en-US" sz="1150" dirty="0">
+              <a:rPr lang="en-US" sz="1250" dirty="0">
                 <a:solidFill>
                   <a:srgbClr val="E6EDF2"/>
                 </a:solidFill>
@@ -33308,14 +33359,14 @@
               </a:rPr>
               <a:t>prg32_gfx_rect:                # one of 139 generated stubs</a:t>
             </a:r>
-            <a:endParaRPr lang="en-US" sz="1150" dirty="0"/>
+            <a:endParaRPr lang="en-US" sz="1250" dirty="0"/>
           </a:p>
           <a:p>
             <a:pPr indent="0" marL="0">
               <a:buNone/>
             </a:pPr>
             <a:r>
-              <a:rPr lang="en-US" sz="1150" dirty="0">
+              <a:rPr lang="en-US" sz="1250" dirty="0">
                 <a:solidFill>
                   <a:srgbClr val="E6EDF2"/>
                 </a:solidFill>
@@ -33325,14 +33376,14 @@
               </a:rPr>
               <a:t>    la   t0, __prg32_abi       # where the table pointer was saved</a:t>
             </a:r>
-            <a:endParaRPr lang="en-US" sz="1150" dirty="0"/>
+            <a:endParaRPr lang="en-US" sz="1250" dirty="0"/>
           </a:p>
           <a:p>
             <a:pPr indent="0" marL="0">
               <a:buNone/>
             </a:pPr>
             <a:r>
-              <a:rPr lang="en-US" sz="1150" dirty="0">
+              <a:rPr lang="en-US" sz="1250" dirty="0">
                 <a:solidFill>
                   <a:srgbClr val="E6EDF2"/>
                 </a:solidFill>
@@ -33342,14 +33393,14 @@
               </a:rPr>
               <a:t>    lw   t0, 0(t0)             # t0 = address of the ABI table</a:t>
             </a:r>
-            <a:endParaRPr lang="en-US" sz="1150" dirty="0"/>
+            <a:endParaRPr lang="en-US" sz="1250" dirty="0"/>
           </a:p>
           <a:p>
             <a:pPr indent="0" marL="0">
               <a:buNone/>
             </a:pPr>
             <a:r>
-              <a:rPr lang="en-US" sz="1150" dirty="0">
+              <a:rPr lang="en-US" sz="1250" dirty="0">
                 <a:solidFill>
                   <a:srgbClr val="E6EDF2"/>
                 </a:solidFill>
@@ -33359,14 +33410,14 @@
               </a:rPr>
               <a:t>    lw   t1, 104(t0)           # t1 = table entry for this function</a:t>
             </a:r>
-            <a:endParaRPr lang="en-US" sz="1150" dirty="0"/>
+            <a:endParaRPr lang="en-US" sz="1250" dirty="0"/>
           </a:p>
           <a:p>
             <a:pPr indent="0" marL="0">
               <a:buNone/>
             </a:pPr>
             <a:r>
-              <a:rPr lang="en-US" sz="1150" dirty="0">
+              <a:rPr lang="en-US" sz="1250" dirty="0">
                 <a:solidFill>
                   <a:srgbClr val="E6EDF2"/>
                 </a:solidFill>
@@ -33374,16 +33425,16 @@
                 <a:ea typeface="Courier New" pitchFamily="34" charset="-122"/>
                 <a:cs typeface="Courier New" pitchFamily="34" charset="-120"/>
               </a:rPr>
-              <a:t>    jr   t1                    # jump there; arguments untouched in a0..a7</a:t>
-            </a:r>
-            <a:endParaRPr lang="en-US" sz="1150" dirty="0"/>
+              <a:t>    jr   t1                    # jump there; arguments untouched in</a:t>
+            </a:r>
+            <a:endParaRPr lang="en-US" sz="1250" dirty="0"/>
           </a:p>
           <a:p>
             <a:pPr indent="0" marL="0">
               <a:buNone/>
             </a:pPr>
             <a:r>
-              <a:rPr lang="en-US" sz="1150" dirty="0">
+              <a:rPr lang="en-US" sz="1250" dirty="0">
                 <a:solidFill>
                   <a:srgbClr val="E6EDF2"/>
                 </a:solidFill>
@@ -33391,16 +33442,16 @@
                 <a:ea typeface="Courier New" pitchFamily="34" charset="-122"/>
                 <a:cs typeface="Courier New" pitchFamily="34" charset="-120"/>
               </a:rPr>
-              <a:t> </a:t>
-            </a:r>
-            <a:endParaRPr lang="en-US" sz="1150" dirty="0"/>
+              <a:t>        a0..a7</a:t>
+            </a:r>
+            <a:endParaRPr lang="en-US" sz="1250" dirty="0"/>
           </a:p>
           <a:p>
             <a:pPr indent="0" marL="0">
               <a:buNone/>
             </a:pPr>
             <a:r>
-              <a:rPr lang="en-US" sz="1150" dirty="0">
+              <a:rPr lang="en-US" sz="1250" dirty="0">
                 <a:solidFill>
                   <a:srgbClr val="E6EDF2"/>
                 </a:solidFill>
@@ -33408,16 +33459,16 @@
                 <a:ea typeface="Courier New" pitchFamily="34" charset="-122"/>
                 <a:cs typeface="Courier New" pitchFamily="34" charset="-120"/>
               </a:rPr>
-              <a:t>prg32_entry_update:            # what the console really calls</a:t>
-            </a:r>
-            <a:endParaRPr lang="en-US" sz="1150" dirty="0"/>
+              <a:t> </a:t>
+            </a:r>
+            <a:endParaRPr lang="en-US" sz="1250" dirty="0"/>
           </a:p>
           <a:p>
             <a:pPr indent="0" marL="0">
               <a:buNone/>
             </a:pPr>
             <a:r>
-              <a:rPr lang="en-US" sz="1150" dirty="0">
+              <a:rPr lang="en-US" sz="1250" dirty="0">
                 <a:solidFill>
                   <a:srgbClr val="E6EDF2"/>
                 </a:solidFill>
@@ -33425,16 +33476,16 @@
                 <a:ea typeface="Courier New" pitchFamily="34" charset="-122"/>
                 <a:cs typeface="Courier New" pitchFamily="34" charset="-120"/>
               </a:rPr>
-              <a:t>    addi sp, sp, -16</a:t>
-            </a:r>
-            <a:endParaRPr lang="en-US" sz="1150" dirty="0"/>
+              <a:t>prg32_entry_update:            # what the console really calls</a:t>
+            </a:r>
+            <a:endParaRPr lang="en-US" sz="1250" dirty="0"/>
           </a:p>
           <a:p>
             <a:pPr indent="0" marL="0">
               <a:buNone/>
             </a:pPr>
             <a:r>
-              <a:rPr lang="en-US" sz="1150" dirty="0">
+              <a:rPr lang="en-US" sz="1250" dirty="0">
                 <a:solidFill>
                   <a:srgbClr val="E6EDF2"/>
                 </a:solidFill>
@@ -33442,16 +33493,16 @@
                 <a:ea typeface="Courier New" pitchFamily="34" charset="-122"/>
                 <a:cs typeface="Courier New" pitchFamily="34" charset="-120"/>
               </a:rPr>
-              <a:t>    sw   ra, 12(sp)</a:t>
-            </a:r>
-            <a:endParaRPr lang="en-US" sz="1150" dirty="0"/>
+              <a:t>    addi sp, sp, -16</a:t>
+            </a:r>
+            <a:endParaRPr lang="en-US" sz="1250" dirty="0"/>
           </a:p>
           <a:p>
             <a:pPr indent="0" marL="0">
               <a:buNone/>
             </a:pPr>
             <a:r>
-              <a:rPr lang="en-US" sz="1150" dirty="0">
+              <a:rPr lang="en-US" sz="1250" dirty="0">
                 <a:solidFill>
                   <a:srgbClr val="E6EDF2"/>
                 </a:solidFill>
@@ -33459,16 +33510,16 @@
                 <a:ea typeface="Courier New" pitchFamily="34" charset="-122"/>
                 <a:cs typeface="Courier New" pitchFamily="34" charset="-120"/>
               </a:rPr>
-              <a:t>    la   t0, __prg32_abi</a:t>
-            </a:r>
-            <a:endParaRPr lang="en-US" sz="1150" dirty="0"/>
+              <a:t>    sw   ra, 12(sp)</a:t>
+            </a:r>
+            <a:endParaRPr lang="en-US" sz="1250" dirty="0"/>
           </a:p>
           <a:p>
             <a:pPr indent="0" marL="0">
               <a:buNone/>
             </a:pPr>
             <a:r>
-              <a:rPr lang="en-US" sz="1150" dirty="0">
+              <a:rPr lang="en-US" sz="1250" dirty="0">
                 <a:solidFill>
                   <a:srgbClr val="E6EDF2"/>
                 </a:solidFill>
@@ -33476,16 +33527,16 @@
                 <a:ea typeface="Courier New" pitchFamily="34" charset="-122"/>
                 <a:cs typeface="Courier New" pitchFamily="34" charset="-120"/>
               </a:rPr>
-              <a:t>    sw   a0, 0(t0)             # the console passes the table in a0</a:t>
-            </a:r>
-            <a:endParaRPr lang="en-US" sz="1150" dirty="0"/>
+              <a:t>    la   t0, __prg32_abi</a:t>
+            </a:r>
+            <a:endParaRPr lang="en-US" sz="1250" dirty="0"/>
           </a:p>
           <a:p>
             <a:pPr indent="0" marL="0">
               <a:buNone/>
             </a:pPr>
             <a:r>
-              <a:rPr lang="en-US" sz="1150" dirty="0">
+              <a:rPr lang="en-US" sz="1250" dirty="0">
                 <a:solidFill>
                   <a:srgbClr val="E6EDF2"/>
                 </a:solidFill>
@@ -33493,16 +33544,16 @@
                 <a:ea typeface="Courier New" pitchFamily="34" charset="-122"/>
                 <a:cs typeface="Courier New" pitchFamily="34" charset="-120"/>
               </a:rPr>
-              <a:t>    call pong_update           # your function</a:t>
-            </a:r>
-            <a:endParaRPr lang="en-US" sz="1150" dirty="0"/>
+              <a:t>    sw   a0, 0(t0)             # the console passes the table in a0</a:t>
+            </a:r>
+            <a:endParaRPr lang="en-US" sz="1250" dirty="0"/>
           </a:p>
           <a:p>
             <a:pPr indent="0" marL="0">
               <a:buNone/>
             </a:pPr>
             <a:r>
-              <a:rPr lang="en-US" sz="1150" dirty="0">
+              <a:rPr lang="en-US" sz="1250" dirty="0">
                 <a:solidFill>
                   <a:srgbClr val="E6EDF2"/>
                 </a:solidFill>
@@ -33510,16 +33561,16 @@
                 <a:ea typeface="Courier New" pitchFamily="34" charset="-122"/>
                 <a:cs typeface="Courier New" pitchFamily="34" charset="-120"/>
               </a:rPr>
-              <a:t>    lw   ra, 12(sp)</a:t>
-            </a:r>
-            <a:endParaRPr lang="en-US" sz="1150" dirty="0"/>
+              <a:t>    call pong_update           # your function</a:t>
+            </a:r>
+            <a:endParaRPr lang="en-US" sz="1250" dirty="0"/>
           </a:p>
           <a:p>
             <a:pPr indent="0" marL="0">
               <a:buNone/>
             </a:pPr>
             <a:r>
-              <a:rPr lang="en-US" sz="1150" dirty="0">
+              <a:rPr lang="en-US" sz="1250" dirty="0">
                 <a:solidFill>
                   <a:srgbClr val="E6EDF2"/>
                 </a:solidFill>
@@ -33527,16 +33578,16 @@
                 <a:ea typeface="Courier New" pitchFamily="34" charset="-122"/>
                 <a:cs typeface="Courier New" pitchFamily="34" charset="-120"/>
               </a:rPr>
-              <a:t>    addi sp, sp, 16</a:t>
-            </a:r>
-            <a:endParaRPr lang="en-US" sz="1150" dirty="0"/>
+              <a:t>    lw   ra, 12(sp)</a:t>
+            </a:r>
+            <a:endParaRPr lang="en-US" sz="1250" dirty="0"/>
           </a:p>
           <a:p>
             <a:pPr indent="0" marL="0">
               <a:buNone/>
             </a:pPr>
             <a:r>
-              <a:rPr lang="en-US" sz="1150" dirty="0">
+              <a:rPr lang="en-US" sz="1250" dirty="0">
                 <a:solidFill>
                   <a:srgbClr val="E6EDF2"/>
                 </a:solidFill>
@@ -33544,9 +33595,26 @@
                 <a:ea typeface="Courier New" pitchFamily="34" charset="-122"/>
                 <a:cs typeface="Courier New" pitchFamily="34" charset="-120"/>
               </a:rPr>
+              <a:t>    addi sp, sp, 16</a:t>
+            </a:r>
+            <a:endParaRPr lang="en-US" sz="1250" dirty="0"/>
+          </a:p>
+          <a:p>
+            <a:pPr indent="0" marL="0">
+              <a:buNone/>
+            </a:pPr>
+            <a:r>
+              <a:rPr lang="en-US" sz="1250" dirty="0">
+                <a:solidFill>
+                  <a:srgbClr val="E6EDF2"/>
+                </a:solidFill>
+                <a:latin typeface="Courier New" pitchFamily="34" charset="0"/>
+                <a:ea typeface="Courier New" pitchFamily="34" charset="-122"/>
+                <a:cs typeface="Courier New" pitchFamily="34" charset="-120"/>
+              </a:rPr>
               <a:t>    ret</a:t>
             </a:r>
-            <a:endParaRPr lang="en-US" sz="1150" dirty="0"/>
+            <a:endParaRPr lang="en-US" sz="1250" dirty="0"/>
           </a:p>
         </p:txBody>
       </p:sp>
@@ -36403,7 +36471,7 @@
               <a:buNone/>
             </a:pPr>
             <a:r>
-              <a:rPr lang="en-US" sz="1000" dirty="0">
+              <a:rPr lang="en-US" sz="1250" dirty="0">
                 <a:solidFill>
                   <a:srgbClr val="E6EDF2"/>
                 </a:solidFill>
@@ -36413,14 +36481,14 @@
               </a:rPr>
               <a:t>void mixed_update(void) {</a:t>
             </a:r>
-            <a:endParaRPr lang="en-US" sz="1000" dirty="0"/>
+            <a:endParaRPr lang="en-US" sz="1250" dirty="0"/>
           </a:p>
           <a:p>
             <a:pPr indent="0" marL="0">
               <a:buNone/>
             </a:pPr>
             <a:r>
-              <a:rPr lang="en-US" sz="1000" dirty="0">
+              <a:rPr lang="en-US" sz="1250" dirty="0">
                 <a:solidFill>
                   <a:srgbClr val="E6EDF2"/>
                 </a:solidFill>
@@ -36430,14 +36498,14 @@
               </a:rPr>
               <a:t>    uint32_t input = prg32_input_read();</a:t>
             </a:r>
-            <a:endParaRPr lang="en-US" sz="1000" dirty="0"/>
+            <a:endParaRPr lang="en-US" sz="1250" dirty="0"/>
           </a:p>
           <a:p>
             <a:pPr indent="0" marL="0">
               <a:buNone/>
             </a:pPr>
             <a:r>
-              <a:rPr lang="en-US" sz="1000" dirty="0">
+              <a:rPr lang="en-US" sz="1250" dirty="0">
                 <a:solidFill>
                   <a:srgbClr val="E6EDF2"/>
                 </a:solidFill>
@@ -36447,14 +36515,14 @@
               </a:rPr>
               <a:t>    if (input &amp; PRG32_BTN_LEFT)  { paddle_x -= 4; }</a:t>
             </a:r>
-            <a:endParaRPr lang="en-US" sz="1000" dirty="0"/>
+            <a:endParaRPr lang="en-US" sz="1250" dirty="0"/>
           </a:p>
           <a:p>
             <a:pPr indent="0" marL="0">
               <a:buNone/>
             </a:pPr>
             <a:r>
-              <a:rPr lang="en-US" sz="1000" dirty="0">
+              <a:rPr lang="en-US" sz="1250" dirty="0">
                 <a:solidFill>
                   <a:srgbClr val="E6EDF2"/>
                 </a:solidFill>
@@ -36464,14 +36532,14 @@
               </a:rPr>
               <a:t>    if (input &amp; PRG32_BTN_RIGHT) { paddle_x += 4; }</a:t>
             </a:r>
-            <a:endParaRPr lang="en-US" sz="1000" dirty="0"/>
+            <a:endParaRPr lang="en-US" sz="1250" dirty="0"/>
           </a:p>
           <a:p>
             <a:pPr indent="0" marL="0">
               <a:buNone/>
             </a:pPr>
             <a:r>
-              <a:rPr lang="en-US" sz="1000" dirty="0">
+              <a:rPr lang="en-US" sz="1250" dirty="0">
                 <a:solidFill>
                   <a:srgbClr val="E6EDF2"/>
                 </a:solidFill>
@@ -36481,14 +36549,14 @@
               </a:rPr>
               <a:t>    if (paddle_x &lt; 0) { paddle_x = 0; }</a:t>
             </a:r>
-            <a:endParaRPr lang="en-US" sz="1000" dirty="0"/>
+            <a:endParaRPr lang="en-US" sz="1250" dirty="0"/>
           </a:p>
           <a:p>
             <a:pPr indent="0" marL="0">
               <a:buNone/>
             </a:pPr>
             <a:r>
-              <a:rPr lang="en-US" sz="1000" dirty="0">
+              <a:rPr lang="en-US" sz="1250" dirty="0">
                 <a:solidFill>
                   <a:srgbClr val="E6EDF2"/>
                 </a:solidFill>
@@ -36496,16 +36564,16 @@
                 <a:ea typeface="Courier New" pitchFamily="34" charset="-122"/>
                 <a:cs typeface="Courier New" pitchFamily="34" charset="-120"/>
               </a:rPr>
-              <a:t>    if (paddle_x &gt; PRG32_GAME_W - PADDLE_W) { paddle_x = PRG32_GAME_W - PADDLE_W; }</a:t>
-            </a:r>
-            <a:endParaRPr lang="en-US" sz="1000" dirty="0"/>
+              <a:t>    if (paddle_x &gt; PRG32_GAME_W - PADDLE_W) { paddle_x =</a:t>
+            </a:r>
+            <a:endParaRPr lang="en-US" sz="1250" dirty="0"/>
           </a:p>
           <a:p>
             <a:pPr indent="0" marL="0">
               <a:buNone/>
             </a:pPr>
             <a:r>
-              <a:rPr lang="en-US" sz="1000" dirty="0">
+              <a:rPr lang="en-US" sz="1250" dirty="0">
                 <a:solidFill>
                   <a:srgbClr val="E6EDF2"/>
                 </a:solidFill>
@@ -36513,16 +36581,16 @@
                 <a:ea typeface="Courier New" pitchFamily="34" charset="-122"/>
                 <a:cs typeface="Courier New" pitchFamily="34" charset="-120"/>
               </a:rPr>
-              <a:t> </a:t>
-            </a:r>
-            <a:endParaRPr lang="en-US" sz="1000" dirty="0"/>
+              <a:t>        PRG32_GAME_W - PADDLE_W; }</a:t>
+            </a:r>
+            <a:endParaRPr lang="en-US" sz="1250" dirty="0"/>
           </a:p>
           <a:p>
             <a:pPr indent="0" marL="0">
               <a:buNone/>
             </a:pPr>
             <a:r>
-              <a:rPr lang="en-US" sz="1000" dirty="0">
+              <a:rPr lang="en-US" sz="1250" dirty="0">
                 <a:solidFill>
                   <a:srgbClr val="E6EDF2"/>
                 </a:solidFill>
@@ -36530,47 +36598,47 @@
                 <a:ea typeface="Courier New" pitchFamily="34" charset="-122"/>
                 <a:cs typeface="Courier New" pitchFamily="34" charset="-120"/>
               </a:rPr>
-              <a:t>    </a:t>
-            </a:r>
+              <a:t> </a:t>
+            </a:r>
+            <a:endParaRPr lang="en-US" sz="1250" dirty="0"/>
+          </a:p>
+          <a:p>
             <a:pPr indent="0" marL="0">
               <a:buNone/>
             </a:pPr>
             <a:r>
-              <a:rPr lang="en-US" sz="1000" dirty="0">
-                <a:solidFill>
-                  <a:srgbClr val="8FB3A0"/>
+              <a:rPr lang="en-US" sz="1250" dirty="0">
+                <a:solidFill>
+                  <a:srgbClr val="E6EDF2"/>
                 </a:solidFill>
                 <a:latin typeface="Courier New" pitchFamily="34" charset="0"/>
                 <a:ea typeface="Courier New" pitchFamily="34" charset="-122"/>
                 <a:cs typeface="Courier New" pitchFamily="34" charset="-120"/>
               </a:rPr>
-              <a:t>/* C calls assembly: pass two addresses and a limit */</a:t>
-            </a:r>
-            <a:endParaRPr lang="en-US" sz="1000" dirty="0"/>
-          </a:p>
-          <a:p>
+              <a:t>    </a:t>
+            </a:r>
             <a:pPr indent="0" marL="0">
               <a:buNone/>
             </a:pPr>
             <a:r>
-              <a:rPr lang="en-US" sz="1000" dirty="0">
-                <a:solidFill>
-                  <a:srgbClr val="E6EDF2"/>
+              <a:rPr lang="en-US" sz="1250" dirty="0">
+                <a:solidFill>
+                  <a:srgbClr val="8FB3A0"/>
                 </a:solidFill>
                 <a:latin typeface="Courier New" pitchFamily="34" charset="0"/>
                 <a:ea typeface="Courier New" pitchFamily="34" charset="-122"/>
                 <a:cs typeface="Courier New" pitchFamily="34" charset="-120"/>
               </a:rPr>
-              <a:t>    ball_step_asm(&amp;ball_x, &amp;ball_dx, PRG32_GAME_W - BALL_SIZE);</a:t>
-            </a:r>
-            <a:endParaRPr lang="en-US" sz="1000" dirty="0"/>
+              <a:t>/* C calls assembly: pass two addresses and a limit */</a:t>
+            </a:r>
+            <a:endParaRPr lang="en-US" sz="1250" dirty="0"/>
           </a:p>
           <a:p>
             <a:pPr indent="0" marL="0">
               <a:buNone/>
             </a:pPr>
             <a:r>
-              <a:rPr lang="en-US" sz="1000" dirty="0">
+              <a:rPr lang="en-US" sz="1250" dirty="0">
                 <a:solidFill>
                   <a:srgbClr val="E6EDF2"/>
                 </a:solidFill>
@@ -36578,47 +36646,47 @@
                 <a:ea typeface="Courier New" pitchFamily="34" charset="-122"/>
                 <a:cs typeface="Courier New" pitchFamily="34" charset="-120"/>
               </a:rPr>
-              <a:t>    ball_step_asm(&amp;ball_y, &amp;ball_dy, 100000); </a:t>
-            </a:r>
+              <a:t>    ball_step_asm(&amp;ball_x, &amp;ball_dx, PRG32_GAME_W - BALL_SIZE);</a:t>
+            </a:r>
+            <a:endParaRPr lang="en-US" sz="1250" dirty="0"/>
+          </a:p>
+          <a:p>
             <a:pPr indent="0" marL="0">
               <a:buNone/>
             </a:pPr>
             <a:r>
-              <a:rPr lang="en-US" sz="1000" dirty="0">
-                <a:solidFill>
-                  <a:srgbClr val="8FB3A0"/>
+              <a:rPr lang="en-US" sz="1250" dirty="0">
+                <a:solidFill>
+                  <a:srgbClr val="E6EDF2"/>
                 </a:solidFill>
                 <a:latin typeface="Courier New" pitchFamily="34" charset="0"/>
                 <a:ea typeface="Courier New" pitchFamily="34" charset="-122"/>
                 <a:cs typeface="Courier New" pitchFamily="34" charset="-120"/>
               </a:rPr>
-              <a:t>/* no floor: the ball can be lost */</a:t>
-            </a:r>
-            <a:endParaRPr lang="en-US" sz="1000" dirty="0"/>
-          </a:p>
-          <a:p>
+              <a:t>    ball_step_asm(&amp;ball_y, &amp;ball_dy, 100000); </a:t>
+            </a:r>
             <a:pPr indent="0" marL="0">
               <a:buNone/>
             </a:pPr>
             <a:r>
-              <a:rPr lang="en-US" sz="1000" dirty="0">
-                <a:solidFill>
-                  <a:srgbClr val="E6EDF2"/>
+              <a:rPr lang="en-US" sz="1250" dirty="0">
+                <a:solidFill>
+                  <a:srgbClr val="8FB3A0"/>
                 </a:solidFill>
                 <a:latin typeface="Courier New" pitchFamily="34" charset="0"/>
                 <a:ea typeface="Courier New" pitchFamily="34" charset="-122"/>
                 <a:cs typeface="Courier New" pitchFamily="34" charset="-120"/>
               </a:rPr>
-              <a:t>    if (ball_y &gt;= PRG32_GAME_H) {</a:t>
-            </a:r>
-            <a:endParaRPr lang="en-US" sz="1000" dirty="0"/>
+              <a:t>/* no floor: the ball</a:t>
+            </a:r>
+            <a:endParaRPr lang="en-US" sz="1250" dirty="0"/>
           </a:p>
           <a:p>
             <a:pPr indent="0" marL="0">
               <a:buNone/>
             </a:pPr>
             <a:r>
-              <a:rPr lang="en-US" sz="1000" dirty="0">
+              <a:rPr lang="en-US" sz="1250" dirty="0">
                 <a:solidFill>
                   <a:srgbClr val="E6EDF2"/>
                 </a:solidFill>
@@ -36626,16 +36694,16 @@
                 <a:ea typeface="Courier New" pitchFamily="34" charset="-122"/>
                 <a:cs typeface="Courier New" pitchFamily="34" charset="-120"/>
               </a:rPr>
-              <a:t>        ball_x = 156;</a:t>
-            </a:r>
-            <a:endParaRPr lang="en-US" sz="1000" dirty="0"/>
+              <a:t>        can be lost */</a:t>
+            </a:r>
+            <a:endParaRPr lang="en-US" sz="1250" dirty="0"/>
           </a:p>
           <a:p>
             <a:pPr indent="0" marL="0">
               <a:buNone/>
             </a:pPr>
             <a:r>
-              <a:rPr lang="en-US" sz="1000" dirty="0">
+              <a:rPr lang="en-US" sz="1250" dirty="0">
                 <a:solidFill>
                   <a:srgbClr val="E6EDF2"/>
                 </a:solidFill>
@@ -36643,16 +36711,16 @@
                 <a:ea typeface="Courier New" pitchFamily="34" charset="-122"/>
                 <a:cs typeface="Courier New" pitchFamily="34" charset="-120"/>
               </a:rPr>
-              <a:t>        ball_y = 120;</a:t>
-            </a:r>
-            <a:endParaRPr lang="en-US" sz="1000" dirty="0"/>
+              <a:t>    if (ball_y &gt;= PRG32_GAME_H) {</a:t>
+            </a:r>
+            <a:endParaRPr lang="en-US" sz="1250" dirty="0"/>
           </a:p>
           <a:p>
             <a:pPr indent="0" marL="0">
               <a:buNone/>
             </a:pPr>
             <a:r>
-              <a:rPr lang="en-US" sz="1000" dirty="0">
+              <a:rPr lang="en-US" sz="1250" dirty="0">
                 <a:solidFill>
                   <a:srgbClr val="E6EDF2"/>
                 </a:solidFill>
@@ -36660,16 +36728,16 @@
                 <a:ea typeface="Courier New" pitchFamily="34" charset="-122"/>
                 <a:cs typeface="Courier New" pitchFamily="34" charset="-120"/>
               </a:rPr>
-              <a:t>        ball_dy = -2;</a:t>
-            </a:r>
-            <a:endParaRPr lang="en-US" sz="1000" dirty="0"/>
+              <a:t>        ball_x = 156;</a:t>
+            </a:r>
+            <a:endParaRPr lang="en-US" sz="1250" dirty="0"/>
           </a:p>
           <a:p>
             <a:pPr indent="0" marL="0">
               <a:buNone/>
             </a:pPr>
             <a:r>
-              <a:rPr lang="en-US" sz="1000" dirty="0">
+              <a:rPr lang="en-US" sz="1250" dirty="0">
                 <a:solidFill>
                   <a:srgbClr val="E6EDF2"/>
                 </a:solidFill>
@@ -36677,9 +36745,43 @@
                 <a:ea typeface="Courier New" pitchFamily="34" charset="-122"/>
                 <a:cs typeface="Courier New" pitchFamily="34" charset="-120"/>
               </a:rPr>
+              <a:t>        ball_y = 120;</a:t>
+            </a:r>
+            <a:endParaRPr lang="en-US" sz="1250" dirty="0"/>
+          </a:p>
+          <a:p>
+            <a:pPr indent="0" marL="0">
+              <a:buNone/>
+            </a:pPr>
+            <a:r>
+              <a:rPr lang="en-US" sz="1250" dirty="0">
+                <a:solidFill>
+                  <a:srgbClr val="E6EDF2"/>
+                </a:solidFill>
+                <a:latin typeface="Courier New" pitchFamily="34" charset="0"/>
+                <a:ea typeface="Courier New" pitchFamily="34" charset="-122"/>
+                <a:cs typeface="Courier New" pitchFamily="34" charset="-120"/>
+              </a:rPr>
+              <a:t>        ball_dy = -2;</a:t>
+            </a:r>
+            <a:endParaRPr lang="en-US" sz="1250" dirty="0"/>
+          </a:p>
+          <a:p>
+            <a:pPr indent="0" marL="0">
+              <a:buNone/>
+            </a:pPr>
+            <a:r>
+              <a:rPr lang="en-US" sz="1250" dirty="0">
+                <a:solidFill>
+                  <a:srgbClr val="E6EDF2"/>
+                </a:solidFill>
+                <a:latin typeface="Courier New" pitchFamily="34" charset="0"/>
+                <a:ea typeface="Courier New" pitchFamily="34" charset="-122"/>
+                <a:cs typeface="Courier New" pitchFamily="34" charset="-120"/>
+              </a:rPr>
               <a:t>    }</a:t>
             </a:r>
-            <a:endParaRPr lang="en-US" sz="1000" dirty="0"/>
+            <a:endParaRPr lang="en-US" sz="1250" dirty="0"/>
           </a:p>
         </p:txBody>
       </p:sp>
@@ -37981,7 +38083,7 @@
               <a:buNone/>
             </a:pPr>
             <a:r>
-              <a:rPr lang="en-US" sz="1150" dirty="0">
+              <a:rPr lang="en-US" sz="1250" dirty="0">
                 <a:solidFill>
                   <a:srgbClr val="E6EDF2"/>
                 </a:solidFill>
@@ -37995,7 +38097,7 @@
               <a:buNone/>
             </a:pPr>
             <a:r>
-              <a:rPr lang="en-US" sz="1150" dirty="0">
+              <a:rPr lang="en-US" sz="1250" dirty="0">
                 <a:solidFill>
                   <a:srgbClr val="8FB3A0"/>
                 </a:solidFill>
@@ -38005,14 +38107,14 @@
               </a:rPr>
               <a:t>/* in C a loop over an array is three lines */</a:t>
             </a:r>
-            <a:endParaRPr lang="en-US" sz="1150" dirty="0"/>
+            <a:endParaRPr lang="en-US" sz="1250" dirty="0"/>
           </a:p>
           <a:p>
             <a:pPr indent="0" marL="0">
               <a:buNone/>
             </a:pPr>
             <a:r>
-              <a:rPr lang="en-US" sz="1150" dirty="0">
+              <a:rPr lang="en-US" sz="1250" dirty="0">
                 <a:solidFill>
                   <a:srgbClr val="E6EDF2"/>
                 </a:solidFill>
@@ -38022,14 +38124,14 @@
               </a:rPr>
               <a:t>    for (int i = 0; i &lt; BRICKS; i++) {</a:t>
             </a:r>
-            <a:endParaRPr lang="en-US" sz="1150" dirty="0"/>
+            <a:endParaRPr lang="en-US" sz="1250" dirty="0"/>
           </a:p>
           <a:p>
             <a:pPr indent="0" marL="0">
               <a:buNone/>
             </a:pPr>
             <a:r>
-              <a:rPr lang="en-US" sz="1150" dirty="0">
+              <a:rPr lang="en-US" sz="1250" dirty="0">
                 <a:solidFill>
                   <a:srgbClr val="E6EDF2"/>
                 </a:solidFill>
@@ -38039,14 +38141,14 @@
               </a:rPr>
               <a:t>        if (bricks[i] &amp;&amp;</a:t>
             </a:r>
-            <a:endParaRPr lang="en-US" sz="1150" dirty="0"/>
+            <a:endParaRPr lang="en-US" sz="1250" dirty="0"/>
           </a:p>
           <a:p>
             <a:pPr indent="0" marL="0">
               <a:buNone/>
             </a:pPr>
             <a:r>
-              <a:rPr lang="en-US" sz="1150" dirty="0">
+              <a:rPr lang="en-US" sz="1250" dirty="0">
                 <a:solidFill>
                   <a:srgbClr val="E6EDF2"/>
                 </a:solidFill>
@@ -38054,16 +38156,16 @@
                 <a:ea typeface="Courier New" pitchFamily="34" charset="-122"/>
                 <a:cs typeface="Courier New" pitchFamily="34" charset="-120"/>
               </a:rPr>
-              <a:t>            prg32_sprite_hitbox(ball_x, ball_y, BALL_SIZE, BALL_SIZE,</a:t>
-            </a:r>
-            <a:endParaRPr lang="en-US" sz="1150" dirty="0"/>
+              <a:t>            prg32_sprite_hitbox(ball_x, ball_y, BALL_SIZE,</a:t>
+            </a:r>
+            <a:endParaRPr lang="en-US" sz="1250" dirty="0"/>
           </a:p>
           <a:p>
             <a:pPr indent="0" marL="0">
               <a:buNone/>
             </a:pPr>
             <a:r>
-              <a:rPr lang="en-US" sz="1150" dirty="0">
+              <a:rPr lang="en-US" sz="1250" dirty="0">
                 <a:solidFill>
                   <a:srgbClr val="E6EDF2"/>
                 </a:solidFill>
@@ -38071,16 +38173,16 @@
                 <a:ea typeface="Courier New" pitchFamily="34" charset="-122"/>
                 <a:cs typeface="Courier New" pitchFamily="34" charset="-120"/>
               </a:rPr>
-              <a:t>                                brick_x(i), brick_y(i), 36, 10)) {</a:t>
-            </a:r>
-            <a:endParaRPr lang="en-US" sz="1150" dirty="0"/>
+              <a:t>                BALL_SIZE,</a:t>
+            </a:r>
+            <a:endParaRPr lang="en-US" sz="1250" dirty="0"/>
           </a:p>
           <a:p>
             <a:pPr indent="0" marL="0">
               <a:buNone/>
             </a:pPr>
             <a:r>
-              <a:rPr lang="en-US" sz="1150" dirty="0">
+              <a:rPr lang="en-US" sz="1250" dirty="0">
                 <a:solidFill>
                   <a:srgbClr val="E6EDF2"/>
                 </a:solidFill>
@@ -38088,16 +38190,16 @@
                 <a:ea typeface="Courier New" pitchFamily="34" charset="-122"/>
                 <a:cs typeface="Courier New" pitchFamily="34" charset="-120"/>
               </a:rPr>
-              <a:t>            bricks[i] = 0;</a:t>
-            </a:r>
-            <a:endParaRPr lang="en-US" sz="1150" dirty="0"/>
+              <a:t>                                brick_x(i), brick_y(i), 36, 10))</a:t>
+            </a:r>
+            <a:endParaRPr lang="en-US" sz="1250" dirty="0"/>
           </a:p>
           <a:p>
             <a:pPr indent="0" marL="0">
               <a:buNone/>
             </a:pPr>
             <a:r>
-              <a:rPr lang="en-US" sz="1150" dirty="0">
+              <a:rPr lang="en-US" sz="1250" dirty="0">
                 <a:solidFill>
                   <a:srgbClr val="E6EDF2"/>
                 </a:solidFill>
@@ -38105,16 +38207,16 @@
                 <a:ea typeface="Courier New" pitchFamily="34" charset="-122"/>
                 <a:cs typeface="Courier New" pitchFamily="34" charset="-120"/>
               </a:rPr>
-              <a:t>            ball_dy = -ball_dy;</a:t>
-            </a:r>
-            <a:endParaRPr lang="en-US" sz="1150" dirty="0"/>
+              <a:t>                                    {</a:t>
+            </a:r>
+            <a:endParaRPr lang="en-US" sz="1250" dirty="0"/>
           </a:p>
           <a:p>
             <a:pPr indent="0" marL="0">
               <a:buNone/>
             </a:pPr>
             <a:r>
-              <a:rPr lang="en-US" sz="1150" dirty="0">
+              <a:rPr lang="en-US" sz="1250" dirty="0">
                 <a:solidFill>
                   <a:srgbClr val="E6EDF2"/>
                 </a:solidFill>
@@ -38122,16 +38224,16 @@
                 <a:ea typeface="Courier New" pitchFamily="34" charset="-122"/>
                 <a:cs typeface="Courier New" pitchFamily="34" charset="-120"/>
               </a:rPr>
-              <a:t>            break;</a:t>
-            </a:r>
-            <a:endParaRPr lang="en-US" sz="1150" dirty="0"/>
+              <a:t>            bricks[i] = 0;</a:t>
+            </a:r>
+            <a:endParaRPr lang="en-US" sz="1250" dirty="0"/>
           </a:p>
           <a:p>
             <a:pPr indent="0" marL="0">
               <a:buNone/>
             </a:pPr>
             <a:r>
-              <a:rPr lang="en-US" sz="1150" dirty="0">
+              <a:rPr lang="en-US" sz="1250" dirty="0">
                 <a:solidFill>
                   <a:srgbClr val="E6EDF2"/>
                 </a:solidFill>
@@ -38139,16 +38241,16 @@
                 <a:ea typeface="Courier New" pitchFamily="34" charset="-122"/>
                 <a:cs typeface="Courier New" pitchFamily="34" charset="-120"/>
               </a:rPr>
-              <a:t>        }</a:t>
-            </a:r>
-            <a:endParaRPr lang="en-US" sz="1150" dirty="0"/>
+              <a:t>            ball_dy = -ball_dy;</a:t>
+            </a:r>
+            <a:endParaRPr lang="en-US" sz="1250" dirty="0"/>
           </a:p>
           <a:p>
             <a:pPr indent="0" marL="0">
               <a:buNone/>
             </a:pPr>
             <a:r>
-              <a:rPr lang="en-US" sz="1150" dirty="0">
+              <a:rPr lang="en-US" sz="1250" dirty="0">
                 <a:solidFill>
                   <a:srgbClr val="E6EDF2"/>
                 </a:solidFill>
@@ -38156,16 +38258,16 @@
                 <a:ea typeface="Courier New" pitchFamily="34" charset="-122"/>
                 <a:cs typeface="Courier New" pitchFamily="34" charset="-120"/>
               </a:rPr>
-              <a:t>    }</a:t>
-            </a:r>
-            <a:endParaRPr lang="en-US" sz="1150" dirty="0"/>
+              <a:t>            break;</a:t>
+            </a:r>
+            <a:endParaRPr lang="en-US" sz="1250" dirty="0"/>
           </a:p>
           <a:p>
             <a:pPr indent="0" marL="0">
               <a:buNone/>
             </a:pPr>
             <a:r>
-              <a:rPr lang="en-US" sz="1150" dirty="0">
+              <a:rPr lang="en-US" sz="1250" dirty="0">
                 <a:solidFill>
                   <a:srgbClr val="E6EDF2"/>
                 </a:solidFill>
@@ -38173,9 +38275,43 @@
                 <a:ea typeface="Courier New" pitchFamily="34" charset="-122"/>
                 <a:cs typeface="Courier New" pitchFamily="34" charset="-120"/>
               </a:rPr>
+              <a:t>        }</a:t>
+            </a:r>
+            <a:endParaRPr lang="en-US" sz="1250" dirty="0"/>
+          </a:p>
+          <a:p>
+            <a:pPr indent="0" marL="0">
+              <a:buNone/>
+            </a:pPr>
+            <a:r>
+              <a:rPr lang="en-US" sz="1250" dirty="0">
+                <a:solidFill>
+                  <a:srgbClr val="E6EDF2"/>
+                </a:solidFill>
+                <a:latin typeface="Courier New" pitchFamily="34" charset="0"/>
+                <a:ea typeface="Courier New" pitchFamily="34" charset="-122"/>
+                <a:cs typeface="Courier New" pitchFamily="34" charset="-120"/>
+              </a:rPr>
+              <a:t>    }</a:t>
+            </a:r>
+            <a:endParaRPr lang="en-US" sz="1250" dirty="0"/>
+          </a:p>
+          <a:p>
+            <a:pPr indent="0" marL="0">
+              <a:buNone/>
+            </a:pPr>
+            <a:r>
+              <a:rPr lang="en-US" sz="1250" dirty="0">
+                <a:solidFill>
+                  <a:srgbClr val="E6EDF2"/>
+                </a:solidFill>
+                <a:latin typeface="Courier New" pitchFamily="34" charset="0"/>
+                <a:ea typeface="Courier New" pitchFamily="34" charset="-122"/>
+                <a:cs typeface="Courier New" pitchFamily="34" charset="-120"/>
+              </a:rPr>
               <a:t>}</a:t>
             </a:r>
-            <a:endParaRPr lang="en-US" sz="1150" dirty="0"/>
+            <a:endParaRPr lang="en-US" sz="1250" dirty="0"/>
           </a:p>
         </p:txBody>
       </p:sp>
